--- a/output/atelier_enseignement_explicite_IA_2026_v4.pptx
+++ b/output/atelier_enseignement_explicite_IA_2026_v4.pptx
@@ -6,17 +6,18 @@
   </p:sldMasterIdLst>
   <p:sldIdLst>
     <p:sldId id="256" r:id="rId2"/>
-    <p:sldId id="257" r:id="rId3"/>
-    <p:sldId id="258" r:id="rId4"/>
-    <p:sldId id="259" r:id="rId5"/>
-    <p:sldId id="260" r:id="rId6"/>
-    <p:sldId id="261" r:id="rId7"/>
-    <p:sldId id="262" r:id="rId8"/>
-    <p:sldId id="263" r:id="rId9"/>
-    <p:sldId id="264" r:id="rId10"/>
-    <p:sldId id="265" r:id="rId11"/>
-    <p:sldId id="266" r:id="rId12"/>
-    <p:sldId id="267" r:id="rId13"/>
+    <p:sldId id="268" r:id="rId3"/>
+    <p:sldId id="257" r:id="rId4"/>
+    <p:sldId id="258" r:id="rId5"/>
+    <p:sldId id="259" r:id="rId6"/>
+    <p:sldId id="260" r:id="rId7"/>
+    <p:sldId id="261" r:id="rId8"/>
+    <p:sldId id="262" r:id="rId9"/>
+    <p:sldId id="263" r:id="rId10"/>
+    <p:sldId id="264" r:id="rId11"/>
+    <p:sldId id="265" r:id="rId12"/>
+    <p:sldId id="266" r:id="rId13"/>
+    <p:sldId id="267" r:id="rId14"/>
   </p:sldIdLst>
   <p:sldSz cx="12192000" cy="6858000"/>
   <p:notesSz cx="6858000" cy="9144000"/>
@@ -313,7 +314,7 @@
           <a:p>
             <a:fld id="{5BCAD085-E8A6-8845-BD4E-CB4CCA059FC4}" type="datetimeFigureOut">
               <a:rPr lang="en-US" smtClean="0"/>
-              <a:t>6/12/2026</a:t>
+              <a:t>6/15/2026</a:t>
             </a:fld>
             <a:endParaRPr lang="en-US"/>
           </a:p>
@@ -481,7 +482,7 @@
           <a:p>
             <a:fld id="{5BCAD085-E8A6-8845-BD4E-CB4CCA059FC4}" type="datetimeFigureOut">
               <a:rPr lang="en-US" smtClean="0"/>
-              <a:t>6/12/2026</a:t>
+              <a:t>6/15/2026</a:t>
             </a:fld>
             <a:endParaRPr lang="en-US"/>
           </a:p>
@@ -659,7 +660,7 @@
           <a:p>
             <a:fld id="{5BCAD085-E8A6-8845-BD4E-CB4CCA059FC4}" type="datetimeFigureOut">
               <a:rPr lang="en-US" smtClean="0"/>
-              <a:t>6/12/2026</a:t>
+              <a:t>6/15/2026</a:t>
             </a:fld>
             <a:endParaRPr lang="en-US"/>
           </a:p>
@@ -827,7 +828,7 @@
           <a:p>
             <a:fld id="{5BCAD085-E8A6-8845-BD4E-CB4CCA059FC4}" type="datetimeFigureOut">
               <a:rPr lang="en-US" smtClean="0"/>
-              <a:t>6/12/2026</a:t>
+              <a:t>6/15/2026</a:t>
             </a:fld>
             <a:endParaRPr lang="en-US"/>
           </a:p>
@@ -1072,7 +1073,7 @@
           <a:p>
             <a:fld id="{5BCAD085-E8A6-8845-BD4E-CB4CCA059FC4}" type="datetimeFigureOut">
               <a:rPr lang="en-US" smtClean="0"/>
-              <a:t>6/12/2026</a:t>
+              <a:t>6/15/2026</a:t>
             </a:fld>
             <a:endParaRPr lang="en-US"/>
           </a:p>
@@ -1357,7 +1358,7 @@
           <a:p>
             <a:fld id="{5BCAD085-E8A6-8845-BD4E-CB4CCA059FC4}" type="datetimeFigureOut">
               <a:rPr lang="en-US" smtClean="0"/>
-              <a:t>6/12/2026</a:t>
+              <a:t>6/15/2026</a:t>
             </a:fld>
             <a:endParaRPr lang="en-US"/>
           </a:p>
@@ -1776,7 +1777,7 @@
           <a:p>
             <a:fld id="{5BCAD085-E8A6-8845-BD4E-CB4CCA059FC4}" type="datetimeFigureOut">
               <a:rPr lang="en-US" smtClean="0"/>
-              <a:t>6/12/2026</a:t>
+              <a:t>6/15/2026</a:t>
             </a:fld>
             <a:endParaRPr lang="en-US"/>
           </a:p>
@@ -1893,7 +1894,7 @@
           <a:p>
             <a:fld id="{5BCAD085-E8A6-8845-BD4E-CB4CCA059FC4}" type="datetimeFigureOut">
               <a:rPr lang="en-US" smtClean="0"/>
-              <a:t>6/12/2026</a:t>
+              <a:t>6/15/2026</a:t>
             </a:fld>
             <a:endParaRPr lang="en-US"/>
           </a:p>
@@ -1988,7 +1989,7 @@
           <a:p>
             <a:fld id="{5BCAD085-E8A6-8845-BD4E-CB4CCA059FC4}" type="datetimeFigureOut">
               <a:rPr lang="en-US" smtClean="0"/>
-              <a:t>6/12/2026</a:t>
+              <a:t>6/15/2026</a:t>
             </a:fld>
             <a:endParaRPr lang="en-US"/>
           </a:p>
@@ -2263,7 +2264,7 @@
           <a:p>
             <a:fld id="{5BCAD085-E8A6-8845-BD4E-CB4CCA059FC4}" type="datetimeFigureOut">
               <a:rPr lang="en-US" smtClean="0"/>
-              <a:t>6/12/2026</a:t>
+              <a:t>6/15/2026</a:t>
             </a:fld>
             <a:endParaRPr lang="en-US"/>
           </a:p>
@@ -2515,7 +2516,7 @@
           <a:p>
             <a:fld id="{5BCAD085-E8A6-8845-BD4E-CB4CCA059FC4}" type="datetimeFigureOut">
               <a:rPr lang="en-US" smtClean="0"/>
-              <a:t>6/12/2026</a:t>
+              <a:t>6/15/2026</a:t>
             </a:fld>
             <a:endParaRPr lang="en-US"/>
           </a:p>
@@ -2726,7 +2727,7 @@
           <a:p>
             <a:fld id="{5BCAD085-E8A6-8845-BD4E-CB4CCA059FC4}" type="datetimeFigureOut">
               <a:rPr lang="en-US" smtClean="0"/>
-              <a:t>6/12/2026</a:t>
+              <a:t>6/15/2026</a:t>
             </a:fld>
             <a:endParaRPr lang="en-US"/>
           </a:p>
@@ -3386,6 +3387,36 @@
           </a:p>
         </p:txBody>
       </p:sp>
+      <p:pic>
+        <p:nvPicPr>
+          <p:cNvPr id="10" name="Image 9">
+            <a:extLst>
+              <a:ext uri="{FF2B5EF4-FFF2-40B4-BE49-F238E27FC236}">
+                <a16:creationId xmlns:a16="http://schemas.microsoft.com/office/drawing/2014/main" id="{EED9603C-0EAB-61DE-B804-636F4B731E34}"/>
+              </a:ext>
+            </a:extLst>
+          </p:cNvPr>
+          <p:cNvPicPr>
+            <a:picLocks noChangeAspect="1"/>
+          </p:cNvPicPr>
+          <p:nvPr/>
+        </p:nvPicPr>
+        <p:blipFill>
+          <a:blip r:embed="rId2"/>
+          <a:stretch>
+            <a:fillRect/>
+          </a:stretch>
+        </p:blipFill>
+        <p:spPr>
+          <a:xfrm>
+            <a:off x="11124914" y="5976856"/>
+            <a:ext cx="1036891" cy="847888"/>
+          </a:xfrm>
+          <a:prstGeom prst="rect">
+            <a:avLst/>
+          </a:prstGeom>
+        </p:spPr>
+      </p:pic>
     </p:spTree>
   </p:cSld>
   <p:clrMapOvr>
@@ -3427,6 +3458,387 @@
         </p:nvSpPr>
         <p:spPr>
           <a:xfrm>
+            <a:off x="4740523" y="320040"/>
+            <a:ext cx="2771913" cy="523220"/>
+          </a:xfrm>
+          <a:prstGeom prst="rect">
+            <a:avLst/>
+          </a:prstGeom>
+          <a:noFill/>
+        </p:spPr>
+        <p:txBody>
+          <a:bodyPr wrap="none">
+            <a:spAutoFit/>
+          </a:bodyPr>
+          <a:lstStyle/>
+          <a:p>
+            <a:pPr algn="ctr"/>
+            <a:r>
+              <a:rPr sz="2800" b="1" dirty="0" err="1">
+                <a:solidFill>
+                  <a:srgbClr val="004A7C"/>
+                </a:solidFill>
+                <a:latin typeface="Montserrat"/>
+              </a:rPr>
+              <a:t>Mutualisation</a:t>
+            </a:r>
+            <a:endParaRPr sz="2800" b="1" dirty="0">
+              <a:solidFill>
+                <a:srgbClr val="004A7C"/>
+              </a:solidFill>
+              <a:latin typeface="Montserrat"/>
+            </a:endParaRPr>
+          </a:p>
+        </p:txBody>
+      </p:sp>
+      <p:sp>
+        <p:nvSpPr>
+          <p:cNvPr id="3" name="Rounded Rectangle 2"/>
+          <p:cNvSpPr/>
+          <p:nvPr/>
+        </p:nvSpPr>
+        <p:spPr>
+          <a:xfrm>
+            <a:off x="914400" y="1828800"/>
+            <a:ext cx="10332720" cy="3200400"/>
+          </a:xfrm>
+          <a:prstGeom prst="roundRect">
+            <a:avLst/>
+          </a:prstGeom>
+          <a:solidFill>
+            <a:srgbClr val="FFFFFF"/>
+          </a:solidFill>
+          <a:ln>
+            <a:solidFill>
+              <a:srgbClr val="D9D9D9"/>
+            </a:solidFill>
+          </a:ln>
+        </p:spPr>
+        <p:style>
+          <a:lnRef idx="1">
+            <a:schemeClr val="accent1"/>
+          </a:lnRef>
+          <a:fillRef idx="3">
+            <a:schemeClr val="accent1"/>
+          </a:fillRef>
+          <a:effectRef idx="2">
+            <a:schemeClr val="accent1"/>
+          </a:effectRef>
+          <a:fontRef idx="minor">
+            <a:schemeClr val="lt1"/>
+          </a:fontRef>
+        </p:style>
+        <p:txBody>
+          <a:bodyPr rtlCol="0" anchor="ctr"/>
+          <a:lstStyle/>
+          <a:p>
+            <a:pPr algn="ctr"/>
+            <a:endParaRPr/>
+          </a:p>
+        </p:txBody>
+      </p:sp>
+      <p:sp>
+        <p:nvSpPr>
+          <p:cNvPr id="4" name="TextBox 3"/>
+          <p:cNvSpPr txBox="1"/>
+          <p:nvPr/>
+        </p:nvSpPr>
+        <p:spPr>
+          <a:xfrm>
+            <a:off x="1234440" y="2286000"/>
+            <a:ext cx="9692640" cy="548640"/>
+          </a:xfrm>
+          <a:prstGeom prst="rect">
+            <a:avLst/>
+          </a:prstGeom>
+          <a:noFill/>
+        </p:spPr>
+        <p:txBody>
+          <a:bodyPr wrap="square" anchor="ctr">
+            <a:spAutoFit/>
+          </a:bodyPr>
+          <a:lstStyle/>
+          <a:p>
+            <a:pPr algn="ctr"/>
+            <a:r>
+              <a:rPr sz="2400" b="1">
+                <a:solidFill>
+                  <a:srgbClr val="004A7C"/>
+                </a:solidFill>
+                <a:latin typeface="Open Sans"/>
+              </a:rPr>
+              <a:t>Partageons vos productions :</a:t>
+            </a:r>
+          </a:p>
+        </p:txBody>
+      </p:sp>
+      <p:sp>
+        <p:nvSpPr>
+          <p:cNvPr id="5" name="TextBox 4"/>
+          <p:cNvSpPr txBox="1"/>
+          <p:nvPr/>
+        </p:nvSpPr>
+        <p:spPr>
+          <a:xfrm>
+            <a:off x="1234440" y="2880360"/>
+            <a:ext cx="9692640" cy="502920"/>
+          </a:xfrm>
+          <a:prstGeom prst="rect">
+            <a:avLst/>
+          </a:prstGeom>
+          <a:noFill/>
+        </p:spPr>
+        <p:txBody>
+          <a:bodyPr wrap="square" anchor="ctr">
+            <a:spAutoFit/>
+          </a:bodyPr>
+          <a:lstStyle/>
+          <a:p>
+            <a:pPr algn="ctr"/>
+            <a:r>
+              <a:rPr sz="2000" b="0">
+                <a:solidFill>
+                  <a:srgbClr val="222222"/>
+                </a:solidFill>
+                <a:latin typeface="Open Sans"/>
+              </a:rPr>
+              <a:t>ce qui vous a surpris, ce que vous allez réutiliser.</a:t>
+            </a:r>
+          </a:p>
+        </p:txBody>
+      </p:sp>
+      <p:sp>
+        <p:nvSpPr>
+          <p:cNvPr id="6" name="Rounded Rectangle 5"/>
+          <p:cNvSpPr/>
+          <p:nvPr/>
+        </p:nvSpPr>
+        <p:spPr>
+          <a:xfrm>
+            <a:off x="1234440" y="3657600"/>
+            <a:ext cx="9692640" cy="777240"/>
+          </a:xfrm>
+          <a:prstGeom prst="roundRect">
+            <a:avLst/>
+          </a:prstGeom>
+          <a:solidFill>
+            <a:srgbClr val="E8F1F8"/>
+          </a:solidFill>
+          <a:ln>
+            <a:solidFill>
+              <a:srgbClr val="E8F1F8"/>
+            </a:solidFill>
+          </a:ln>
+        </p:spPr>
+        <p:style>
+          <a:lnRef idx="1">
+            <a:schemeClr val="accent1"/>
+          </a:lnRef>
+          <a:fillRef idx="3">
+            <a:schemeClr val="accent1"/>
+          </a:fillRef>
+          <a:effectRef idx="2">
+            <a:schemeClr val="accent1"/>
+          </a:effectRef>
+          <a:fontRef idx="minor">
+            <a:schemeClr val="lt1"/>
+          </a:fontRef>
+        </p:style>
+        <p:txBody>
+          <a:bodyPr rtlCol="0" anchor="ctr"/>
+          <a:lstStyle/>
+          <a:p>
+            <a:pPr algn="ctr"/>
+            <a:endParaRPr/>
+          </a:p>
+        </p:txBody>
+      </p:sp>
+      <p:sp>
+        <p:nvSpPr>
+          <p:cNvPr id="7" name="TextBox 6"/>
+          <p:cNvSpPr txBox="1"/>
+          <p:nvPr/>
+        </p:nvSpPr>
+        <p:spPr>
+          <a:xfrm>
+            <a:off x="1417320" y="3913632"/>
+            <a:ext cx="9326880" cy="182880"/>
+          </a:xfrm>
+          <a:prstGeom prst="rect">
+            <a:avLst/>
+          </a:prstGeom>
+          <a:noFill/>
+        </p:spPr>
+        <p:txBody>
+          <a:bodyPr wrap="square" anchor="ctr">
+            <a:spAutoFit/>
+          </a:bodyPr>
+          <a:lstStyle/>
+          <a:p>
+            <a:pPr algn="ctr"/>
+            <a:r>
+              <a:rPr sz="1500" b="0">
+                <a:solidFill>
+                  <a:srgbClr val="004A7C"/>
+                </a:solidFill>
+                <a:latin typeface="Open Sans"/>
+              </a:rPr>
+              <a:t>Espace pour captures ou retours oraux</a:t>
+            </a:r>
+          </a:p>
+        </p:txBody>
+      </p:sp>
+      <p:sp>
+        <p:nvSpPr>
+          <p:cNvPr id="8" name="Rectangle 7"/>
+          <p:cNvSpPr/>
+          <p:nvPr/>
+        </p:nvSpPr>
+        <p:spPr>
+          <a:xfrm>
+            <a:off x="502920" y="6382512"/>
+            <a:ext cx="11155680" cy="27432"/>
+          </a:xfrm>
+          <a:prstGeom prst="rect">
+            <a:avLst/>
+          </a:prstGeom>
+          <a:solidFill>
+            <a:srgbClr val="F36C21"/>
+          </a:solidFill>
+          <a:ln>
+            <a:noFill/>
+          </a:ln>
+        </p:spPr>
+        <p:style>
+          <a:lnRef idx="1">
+            <a:schemeClr val="accent1"/>
+          </a:lnRef>
+          <a:fillRef idx="3">
+            <a:schemeClr val="accent1"/>
+          </a:fillRef>
+          <a:effectRef idx="2">
+            <a:schemeClr val="accent1"/>
+          </a:effectRef>
+          <a:fontRef idx="minor">
+            <a:schemeClr val="lt1"/>
+          </a:fontRef>
+        </p:style>
+        <p:txBody>
+          <a:bodyPr rtlCol="0" anchor="ctr"/>
+          <a:lstStyle/>
+          <a:p>
+            <a:pPr algn="ctr"/>
+            <a:endParaRPr/>
+          </a:p>
+        </p:txBody>
+      </p:sp>
+      <p:sp>
+        <p:nvSpPr>
+          <p:cNvPr id="9" name="TextBox 8"/>
+          <p:cNvSpPr txBox="1"/>
+          <p:nvPr/>
+        </p:nvSpPr>
+        <p:spPr>
+          <a:xfrm>
+            <a:off x="548640" y="6400800"/>
+            <a:ext cx="2743200" cy="201168"/>
+          </a:xfrm>
+          <a:prstGeom prst="rect">
+            <a:avLst/>
+          </a:prstGeom>
+          <a:noFill/>
+        </p:spPr>
+        <p:txBody>
+          <a:bodyPr wrap="none">
+            <a:spAutoFit/>
+          </a:bodyPr>
+          <a:lstStyle/>
+          <a:p>
+            <a:pPr>
+              <a:defRPr sz="1100">
+                <a:solidFill>
+                  <a:srgbClr val="004A7C"/>
+                </a:solidFill>
+                <a:latin typeface="Open Sans"/>
+              </a:defRPr>
+            </a:pPr>
+            <a:r>
+              <a:t>atelier IA 2026</a:t>
+            </a:r>
+          </a:p>
+        </p:txBody>
+      </p:sp>
+      <p:pic>
+        <p:nvPicPr>
+          <p:cNvPr id="10" name="Image 9">
+            <a:extLst>
+              <a:ext uri="{FF2B5EF4-FFF2-40B4-BE49-F238E27FC236}">
+                <a16:creationId xmlns:a16="http://schemas.microsoft.com/office/drawing/2014/main" id="{D519A47B-EA04-87EA-826E-E8FA2B4AEF77}"/>
+              </a:ext>
+            </a:extLst>
+          </p:cNvPr>
+          <p:cNvPicPr>
+            <a:picLocks noChangeAspect="1"/>
+          </p:cNvPicPr>
+          <p:nvPr/>
+        </p:nvPicPr>
+        <p:blipFill>
+          <a:blip r:embed="rId2"/>
+          <a:stretch>
+            <a:fillRect/>
+          </a:stretch>
+        </p:blipFill>
+        <p:spPr>
+          <a:xfrm>
+            <a:off x="11124914" y="5976856"/>
+            <a:ext cx="1036891" cy="847888"/>
+          </a:xfrm>
+          <a:prstGeom prst="rect">
+            <a:avLst/>
+          </a:prstGeom>
+        </p:spPr>
+      </p:pic>
+    </p:spTree>
+  </p:cSld>
+  <p:clrMapOvr>
+    <a:masterClrMapping/>
+  </p:clrMapOvr>
+</p:sld>
+</file>
+
+<file path=ppt/slides/slide11.xml><?xml version="1.0" encoding="utf-8"?>
+<p:sld xmlns:a="http://schemas.openxmlformats.org/drawingml/2006/main" xmlns:r="http://schemas.openxmlformats.org/officeDocument/2006/relationships" xmlns:p="http://schemas.openxmlformats.org/presentationml/2006/main">
+  <p:cSld>
+    <p:bg>
+      <p:bgPr>
+        <a:solidFill>
+          <a:srgbClr val="F5F5F5"/>
+        </a:solidFill>
+        <a:effectLst/>
+      </p:bgPr>
+    </p:bg>
+    <p:spTree>
+      <p:nvGrpSpPr>
+        <p:cNvPr id="1" name=""/>
+        <p:cNvGrpSpPr/>
+        <p:nvPr/>
+      </p:nvGrpSpPr>
+      <p:grpSpPr>
+        <a:xfrm>
+          <a:off x="0" y="0"/>
+          <a:ext cx="0" cy="0"/>
+          <a:chOff x="0" y="0"/>
+          <a:chExt cx="0" cy="0"/>
+        </a:xfrm>
+      </p:grpSpPr>
+      <p:sp>
+        <p:nvSpPr>
+          <p:cNvPr id="2" name="TextBox 1"/>
+          <p:cNvSpPr txBox="1"/>
+          <p:nvPr/>
+        </p:nvSpPr>
+        <p:spPr>
+          <a:xfrm>
             <a:off x="640080" y="320040"/>
             <a:ext cx="10972800" cy="777240"/>
           </a:xfrm>
@@ -3876,6 +4288,36 @@
           </a:prstGeom>
         </p:spPr>
       </p:pic>
+      <p:pic>
+        <p:nvPicPr>
+          <p:cNvPr id="11" name="Image 10">
+            <a:extLst>
+              <a:ext uri="{FF2B5EF4-FFF2-40B4-BE49-F238E27FC236}">
+                <a16:creationId xmlns:a16="http://schemas.microsoft.com/office/drawing/2014/main" id="{0B3FFB22-570D-AE3C-5600-8FD0F3D71A1D}"/>
+              </a:ext>
+            </a:extLst>
+          </p:cNvPr>
+          <p:cNvPicPr>
+            <a:picLocks noChangeAspect="1"/>
+          </p:cNvPicPr>
+          <p:nvPr/>
+        </p:nvPicPr>
+        <p:blipFill>
+          <a:blip r:embed="rId3"/>
+          <a:stretch>
+            <a:fillRect/>
+          </a:stretch>
+        </p:blipFill>
+        <p:spPr>
+          <a:xfrm>
+            <a:off x="11124914" y="5976856"/>
+            <a:ext cx="1036891" cy="847888"/>
+          </a:xfrm>
+          <a:prstGeom prst="rect">
+            <a:avLst/>
+          </a:prstGeom>
+        </p:spPr>
+      </p:pic>
     </p:spTree>
   </p:cSld>
   <p:clrMapOvr>
@@ -3884,7 +4326,7 @@
 </p:sld>
 </file>
 
-<file path=ppt/slides/slide11.xml><?xml version="1.0" encoding="utf-8"?>
+<file path=ppt/slides/slide12.xml><?xml version="1.0" encoding="utf-8"?>
 <p:sld xmlns:a="http://schemas.openxmlformats.org/drawingml/2006/main" xmlns:r="http://schemas.openxmlformats.org/officeDocument/2006/relationships" xmlns:p="http://schemas.openxmlformats.org/presentationml/2006/main">
   <p:cSld>
     <p:bg>
@@ -4114,7 +4556,7 @@
 </p:sld>
 </file>
 
-<file path=ppt/slides/slide12.xml><?xml version="1.0" encoding="utf-8"?>
+<file path=ppt/slides/slide13.xml><?xml version="1.0" encoding="utf-8"?>
 <p:sld xmlns:a="http://schemas.openxmlformats.org/drawingml/2006/main" xmlns:r="http://schemas.openxmlformats.org/officeDocument/2006/relationships" xmlns:p="http://schemas.openxmlformats.org/presentationml/2006/main">
   <p:cSld>
     <p:bg>
@@ -4672,6 +5114,36 @@
           </a:prstGeom>
         </p:spPr>
       </p:pic>
+      <p:pic>
+        <p:nvPicPr>
+          <p:cNvPr id="14" name="Image 13">
+            <a:extLst>
+              <a:ext uri="{FF2B5EF4-FFF2-40B4-BE49-F238E27FC236}">
+                <a16:creationId xmlns:a16="http://schemas.microsoft.com/office/drawing/2014/main" id="{0646BB12-7A30-A050-6464-AB18E519CBC8}"/>
+              </a:ext>
+            </a:extLst>
+          </p:cNvPr>
+          <p:cNvPicPr>
+            <a:picLocks noChangeAspect="1"/>
+          </p:cNvPicPr>
+          <p:nvPr/>
+        </p:nvPicPr>
+        <p:blipFill>
+          <a:blip r:embed="rId4"/>
+          <a:stretch>
+            <a:fillRect/>
+          </a:stretch>
+        </p:blipFill>
+        <p:spPr>
+          <a:xfrm>
+            <a:off x="11124914" y="5976856"/>
+            <a:ext cx="1036891" cy="847888"/>
+          </a:xfrm>
+          <a:prstGeom prst="rect">
+            <a:avLst/>
+          </a:prstGeom>
+        </p:spPr>
+      </p:pic>
     </p:spTree>
   </p:cSld>
   <p:clrMapOvr>
@@ -4686,7 +5158,7 @@
     <p:bg>
       <p:bgPr>
         <a:solidFill>
-          <a:srgbClr val="F5F5F5"/>
+          <a:schemeClr val="bg1"/>
         </a:solidFill>
         <a:effectLst/>
       </p:bgPr>
@@ -4705,585 +5177,376 @@
           <a:chExt cx="0" cy="0"/>
         </a:xfrm>
       </p:grpSpPr>
-      <p:sp>
-        <p:nvSpPr>
-          <p:cNvPr id="2" name="TextBox 1"/>
-          <p:cNvSpPr txBox="1"/>
-          <p:nvPr/>
-        </p:nvSpPr>
-        <p:spPr>
-          <a:xfrm>
-            <a:off x="640080" y="320040"/>
-            <a:ext cx="10972800" cy="777240"/>
-          </a:xfrm>
-          <a:prstGeom prst="rect">
-            <a:avLst/>
-          </a:prstGeom>
-          <a:noFill/>
-        </p:spPr>
-        <p:txBody>
-          <a:bodyPr wrap="none">
-            <a:spAutoFit/>
-          </a:bodyPr>
-          <a:lstStyle/>
-          <a:p>
-            <a:r>
-              <a:rPr sz="2800" b="1">
-                <a:solidFill>
-                  <a:srgbClr val="004A7C"/>
-                </a:solidFill>
-                <a:latin typeface="Montserrat"/>
-              </a:rPr>
-              <a:t>Question d’accroche</a:t>
-            </a:r>
-          </a:p>
-        </p:txBody>
-      </p:sp>
-      <p:sp>
-        <p:nvSpPr>
-          <p:cNvPr id="3" name="TextBox 2"/>
-          <p:cNvSpPr txBox="1"/>
-          <p:nvPr/>
-        </p:nvSpPr>
-        <p:spPr>
-          <a:xfrm>
-            <a:off x="914400" y="1234440"/>
-            <a:ext cx="10332720" cy="594360"/>
-          </a:xfrm>
-          <a:prstGeom prst="rect">
-            <a:avLst/>
-          </a:prstGeom>
-          <a:noFill/>
-        </p:spPr>
-        <p:txBody>
-          <a:bodyPr wrap="square" anchor="ctr">
-            <a:spAutoFit/>
-          </a:bodyPr>
-          <a:lstStyle/>
-          <a:p>
-            <a:pPr algn="ctr"/>
-            <a:r>
-              <a:rPr sz="2200" b="1">
-                <a:solidFill>
-                  <a:srgbClr val="004A7C"/>
-                </a:solidFill>
-                <a:latin typeface="Open Sans"/>
-              </a:rPr>
-              <a:t>Combien de temps vous faut-il pour préparer une séance complète ?</a:t>
-            </a:r>
-          </a:p>
-        </p:txBody>
-      </p:sp>
-      <p:sp>
-        <p:nvSpPr>
-          <p:cNvPr id="4" name="Rounded Rectangle 3"/>
-          <p:cNvSpPr/>
-          <p:nvPr/>
-        </p:nvSpPr>
-        <p:spPr>
-          <a:xfrm>
-            <a:off x="868680" y="2011680"/>
-            <a:ext cx="3383280" cy="1554480"/>
-          </a:xfrm>
-          <a:prstGeom prst="roundRect">
-            <a:avLst/>
-          </a:prstGeom>
-          <a:solidFill>
-            <a:srgbClr val="FFFFFF"/>
-          </a:solidFill>
-          <a:ln>
-            <a:solidFill>
-              <a:srgbClr val="D9D9D9"/>
-            </a:solidFill>
-          </a:ln>
-        </p:spPr>
-        <p:style>
-          <a:lnRef idx="1">
-            <a:schemeClr val="accent1"/>
-          </a:lnRef>
-          <a:fillRef idx="3">
-            <a:schemeClr val="accent1"/>
-          </a:fillRef>
-          <a:effectRef idx="2">
-            <a:schemeClr val="accent1"/>
-          </a:effectRef>
-          <a:fontRef idx="minor">
-            <a:schemeClr val="lt1"/>
-          </a:fontRef>
-        </p:style>
-        <p:txBody>
-          <a:bodyPr rtlCol="0" anchor="ctr"/>
-          <a:lstStyle/>
-          <a:p>
-            <a:pPr algn="ctr"/>
-            <a:endParaRPr/>
-          </a:p>
-        </p:txBody>
-      </p:sp>
-      <p:sp>
-        <p:nvSpPr>
-          <p:cNvPr id="5" name="TextBox 4"/>
-          <p:cNvSpPr txBox="1"/>
-          <p:nvPr/>
-        </p:nvSpPr>
-        <p:spPr>
-          <a:xfrm>
-            <a:off x="868680" y="2212848"/>
-            <a:ext cx="3383280" cy="274320"/>
-          </a:xfrm>
-          <a:prstGeom prst="rect">
-            <a:avLst/>
-          </a:prstGeom>
-          <a:noFill/>
-        </p:spPr>
-        <p:txBody>
-          <a:bodyPr wrap="square" anchor="ctr">
-            <a:spAutoFit/>
-          </a:bodyPr>
-          <a:lstStyle/>
-          <a:p>
-            <a:pPr algn="ctr"/>
-            <a:r>
-              <a:rPr sz="2800" b="0">
-                <a:solidFill>
-                  <a:srgbClr val="F36C21"/>
-                </a:solidFill>
-                <a:latin typeface="Open Sans"/>
-              </a:rPr>
-              <a:t>⏱️</a:t>
-            </a:r>
-          </a:p>
-        </p:txBody>
-      </p:sp>
-      <p:sp>
-        <p:nvSpPr>
-          <p:cNvPr id="6" name="TextBox 5"/>
-          <p:cNvSpPr txBox="1"/>
-          <p:nvPr/>
-        </p:nvSpPr>
-        <p:spPr>
-          <a:xfrm>
-            <a:off x="941832" y="2624328"/>
-            <a:ext cx="3246120" cy="384048"/>
-          </a:xfrm>
-          <a:prstGeom prst="rect">
-            <a:avLst/>
-          </a:prstGeom>
-          <a:noFill/>
-        </p:spPr>
-        <p:txBody>
-          <a:bodyPr wrap="square" anchor="ctr">
-            <a:spAutoFit/>
-          </a:bodyPr>
-          <a:lstStyle/>
-          <a:p>
-            <a:pPr algn="ctr"/>
-            <a:r>
-              <a:rPr sz="1900" b="1">
-                <a:solidFill>
-                  <a:srgbClr val="F36C21"/>
-                </a:solidFill>
-                <a:latin typeface="Open Sans"/>
-              </a:rPr>
-              <a:t>1h</a:t>
-            </a:r>
-          </a:p>
-        </p:txBody>
-      </p:sp>
-      <p:sp>
-        <p:nvSpPr>
-          <p:cNvPr id="7" name="Rounded Rectangle 6"/>
-          <p:cNvSpPr/>
-          <p:nvPr/>
-        </p:nvSpPr>
-        <p:spPr>
-          <a:xfrm>
-            <a:off x="4617720" y="2011680"/>
-            <a:ext cx="3383280" cy="1554480"/>
-          </a:xfrm>
-          <a:prstGeom prst="roundRect">
-            <a:avLst/>
-          </a:prstGeom>
-          <a:solidFill>
-            <a:srgbClr val="FFFFFF"/>
-          </a:solidFill>
-          <a:ln>
-            <a:solidFill>
-              <a:srgbClr val="D9D9D9"/>
-            </a:solidFill>
-          </a:ln>
-        </p:spPr>
-        <p:style>
-          <a:lnRef idx="1">
-            <a:schemeClr val="accent1"/>
-          </a:lnRef>
-          <a:fillRef idx="3">
-            <a:schemeClr val="accent1"/>
-          </a:fillRef>
-          <a:effectRef idx="2">
-            <a:schemeClr val="accent1"/>
-          </a:effectRef>
-          <a:fontRef idx="minor">
-            <a:schemeClr val="lt1"/>
-          </a:fontRef>
-        </p:style>
-        <p:txBody>
-          <a:bodyPr rtlCol="0" anchor="ctr"/>
-          <a:lstStyle/>
-          <a:p>
-            <a:pPr algn="ctr"/>
-            <a:endParaRPr/>
-          </a:p>
-        </p:txBody>
-      </p:sp>
-      <p:sp>
-        <p:nvSpPr>
-          <p:cNvPr id="8" name="TextBox 7"/>
-          <p:cNvSpPr txBox="1"/>
-          <p:nvPr/>
-        </p:nvSpPr>
-        <p:spPr>
-          <a:xfrm>
-            <a:off x="4617720" y="2212848"/>
-            <a:ext cx="3383280" cy="274320"/>
-          </a:xfrm>
-          <a:prstGeom prst="rect">
-            <a:avLst/>
-          </a:prstGeom>
-          <a:noFill/>
-        </p:spPr>
-        <p:txBody>
-          <a:bodyPr wrap="square" anchor="ctr">
-            <a:spAutoFit/>
-          </a:bodyPr>
-          <a:lstStyle/>
-          <a:p>
-            <a:pPr algn="ctr"/>
-            <a:r>
-              <a:rPr sz="2800" b="0">
-                <a:solidFill>
-                  <a:srgbClr val="004A7C"/>
-                </a:solidFill>
-                <a:latin typeface="Open Sans"/>
-              </a:rPr>
-              <a:t>⏱️</a:t>
-            </a:r>
-          </a:p>
-        </p:txBody>
-      </p:sp>
-      <p:sp>
-        <p:nvSpPr>
-          <p:cNvPr id="9" name="TextBox 8"/>
-          <p:cNvSpPr txBox="1"/>
-          <p:nvPr/>
-        </p:nvSpPr>
-        <p:spPr>
-          <a:xfrm>
-            <a:off x="4690872" y="2624328"/>
-            <a:ext cx="3246120" cy="384048"/>
-          </a:xfrm>
-          <a:prstGeom prst="rect">
-            <a:avLst/>
-          </a:prstGeom>
-          <a:noFill/>
-        </p:spPr>
-        <p:txBody>
-          <a:bodyPr wrap="square" anchor="ctr">
-            <a:spAutoFit/>
-          </a:bodyPr>
-          <a:lstStyle/>
-          <a:p>
-            <a:pPr algn="ctr"/>
-            <a:r>
-              <a:rPr sz="1900" b="1">
-                <a:solidFill>
-                  <a:srgbClr val="004A7C"/>
-                </a:solidFill>
-                <a:latin typeface="Open Sans"/>
-              </a:rPr>
-              <a:t>2h</a:t>
-            </a:r>
-          </a:p>
-        </p:txBody>
-      </p:sp>
-      <p:sp>
-        <p:nvSpPr>
-          <p:cNvPr id="10" name="Rounded Rectangle 9"/>
-          <p:cNvSpPr/>
-          <p:nvPr/>
-        </p:nvSpPr>
-        <p:spPr>
-          <a:xfrm>
-            <a:off x="8366759" y="2011680"/>
-            <a:ext cx="3383280" cy="1554480"/>
-          </a:xfrm>
-          <a:prstGeom prst="roundRect">
-            <a:avLst/>
-          </a:prstGeom>
-          <a:solidFill>
-            <a:srgbClr val="FFFFFF"/>
-          </a:solidFill>
-          <a:ln>
-            <a:solidFill>
-              <a:srgbClr val="D9D9D9"/>
-            </a:solidFill>
-          </a:ln>
-        </p:spPr>
-        <p:style>
-          <a:lnRef idx="1">
-            <a:schemeClr val="accent1"/>
-          </a:lnRef>
-          <a:fillRef idx="3">
-            <a:schemeClr val="accent1"/>
-          </a:fillRef>
-          <a:effectRef idx="2">
-            <a:schemeClr val="accent1"/>
-          </a:effectRef>
-          <a:fontRef idx="minor">
-            <a:schemeClr val="lt1"/>
-          </a:fontRef>
-        </p:style>
-        <p:txBody>
-          <a:bodyPr rtlCol="0" anchor="ctr"/>
-          <a:lstStyle/>
-          <a:p>
-            <a:pPr algn="ctr"/>
-            <a:endParaRPr/>
-          </a:p>
-        </p:txBody>
-      </p:sp>
-      <p:sp>
-        <p:nvSpPr>
-          <p:cNvPr id="11" name="TextBox 10"/>
-          <p:cNvSpPr txBox="1"/>
-          <p:nvPr/>
-        </p:nvSpPr>
-        <p:spPr>
-          <a:xfrm>
-            <a:off x="8366759" y="2212848"/>
-            <a:ext cx="3383280" cy="274320"/>
-          </a:xfrm>
-          <a:prstGeom prst="rect">
-            <a:avLst/>
-          </a:prstGeom>
-          <a:noFill/>
-        </p:spPr>
-        <p:txBody>
-          <a:bodyPr wrap="square" anchor="ctr">
-            <a:spAutoFit/>
-          </a:bodyPr>
-          <a:lstStyle/>
-          <a:p>
-            <a:pPr algn="ctr"/>
-            <a:r>
-              <a:rPr sz="2800" b="0">
-                <a:solidFill>
-                  <a:srgbClr val="222222"/>
-                </a:solidFill>
-                <a:latin typeface="Open Sans"/>
-              </a:rPr>
-              <a:t>⏱️</a:t>
-            </a:r>
-          </a:p>
-        </p:txBody>
-      </p:sp>
-      <p:sp>
-        <p:nvSpPr>
-          <p:cNvPr id="12" name="TextBox 11"/>
-          <p:cNvSpPr txBox="1"/>
-          <p:nvPr/>
-        </p:nvSpPr>
-        <p:spPr>
-          <a:xfrm>
-            <a:off x="8439911" y="2624328"/>
-            <a:ext cx="3246120" cy="384048"/>
-          </a:xfrm>
-          <a:prstGeom prst="rect">
-            <a:avLst/>
-          </a:prstGeom>
-          <a:noFill/>
-        </p:spPr>
-        <p:txBody>
-          <a:bodyPr wrap="square" anchor="ctr">
-            <a:spAutoFit/>
-          </a:bodyPr>
-          <a:lstStyle/>
-          <a:p>
-            <a:pPr algn="ctr"/>
-            <a:r>
-              <a:rPr sz="1900" b="1">
-                <a:solidFill>
-                  <a:srgbClr val="222222"/>
-                </a:solidFill>
-                <a:latin typeface="Open Sans"/>
-              </a:rPr>
-              <a:t>Parfois davantage</a:t>
-            </a:r>
-          </a:p>
-        </p:txBody>
-      </p:sp>
-      <p:sp>
-        <p:nvSpPr>
-          <p:cNvPr id="13" name="Rounded Rectangle 12"/>
-          <p:cNvSpPr/>
-          <p:nvPr/>
-        </p:nvSpPr>
-        <p:spPr>
-          <a:xfrm>
-            <a:off x="1097280" y="4160520"/>
-            <a:ext cx="10012680" cy="713232"/>
-          </a:xfrm>
-          <a:prstGeom prst="roundRect">
-            <a:avLst/>
-          </a:prstGeom>
-          <a:solidFill>
-            <a:srgbClr val="ECECEC"/>
-          </a:solidFill>
-          <a:ln>
-            <a:solidFill>
-              <a:srgbClr val="ECECEC"/>
-            </a:solidFill>
-          </a:ln>
-        </p:spPr>
-        <p:style>
-          <a:lnRef idx="1">
-            <a:schemeClr val="accent1"/>
-          </a:lnRef>
-          <a:fillRef idx="3">
-            <a:schemeClr val="accent1"/>
-          </a:fillRef>
-          <a:effectRef idx="2">
-            <a:schemeClr val="accent1"/>
-          </a:effectRef>
-          <a:fontRef idx="minor">
-            <a:schemeClr val="lt1"/>
-          </a:fontRef>
-        </p:style>
-        <p:txBody>
-          <a:bodyPr rtlCol="0" anchor="ctr"/>
-          <a:lstStyle/>
-          <a:p>
-            <a:pPr algn="ctr"/>
-            <a:endParaRPr/>
-          </a:p>
-        </p:txBody>
-      </p:sp>
-      <p:sp>
-        <p:nvSpPr>
-          <p:cNvPr id="14" name="TextBox 13"/>
-          <p:cNvSpPr txBox="1"/>
-          <p:nvPr/>
-        </p:nvSpPr>
-        <p:spPr>
-          <a:xfrm>
-            <a:off x="1325880" y="4379976"/>
-            <a:ext cx="9555480" cy="201168"/>
-          </a:xfrm>
-          <a:prstGeom prst="rect">
-            <a:avLst/>
-          </a:prstGeom>
-          <a:noFill/>
-        </p:spPr>
-        <p:txBody>
-          <a:bodyPr wrap="square" anchor="ctr">
-            <a:spAutoFit/>
-          </a:bodyPr>
-          <a:lstStyle/>
-          <a:p>
-            <a:pPr algn="ctr"/>
-            <a:r>
-              <a:rPr sz="1800" b="0">
-                <a:solidFill>
-                  <a:srgbClr val="222222"/>
-                </a:solidFill>
-                <a:latin typeface="Open Sans"/>
-              </a:rPr>
-              <a:t>Et si nous pouvions réduire ce temps tout en améliorant la différenciation ?</a:t>
-            </a:r>
-          </a:p>
-        </p:txBody>
-      </p:sp>
-      <p:sp>
-        <p:nvSpPr>
-          <p:cNvPr id="15" name="Rectangle 14"/>
-          <p:cNvSpPr/>
-          <p:nvPr/>
-        </p:nvSpPr>
-        <p:spPr>
-          <a:xfrm>
-            <a:off x="502920" y="6382512"/>
-            <a:ext cx="11155680" cy="27432"/>
-          </a:xfrm>
-          <a:prstGeom prst="rect">
-            <a:avLst/>
-          </a:prstGeom>
-          <a:solidFill>
-            <a:srgbClr val="F36C21"/>
-          </a:solidFill>
-          <a:ln>
-            <a:noFill/>
-          </a:ln>
-        </p:spPr>
-        <p:style>
-          <a:lnRef idx="1">
-            <a:schemeClr val="accent1"/>
-          </a:lnRef>
-          <a:fillRef idx="3">
-            <a:schemeClr val="accent1"/>
-          </a:fillRef>
-          <a:effectRef idx="2">
-            <a:schemeClr val="accent1"/>
-          </a:effectRef>
-          <a:fontRef idx="minor">
-            <a:schemeClr val="lt1"/>
-          </a:fontRef>
-        </p:style>
-        <p:txBody>
-          <a:bodyPr rtlCol="0" anchor="ctr"/>
-          <a:lstStyle/>
-          <a:p>
-            <a:pPr algn="ctr"/>
-            <a:endParaRPr/>
-          </a:p>
-        </p:txBody>
-      </p:sp>
-      <p:sp>
-        <p:nvSpPr>
-          <p:cNvPr id="16" name="TextBox 15"/>
-          <p:cNvSpPr txBox="1"/>
-          <p:nvPr/>
-        </p:nvSpPr>
-        <p:spPr>
-          <a:xfrm>
-            <a:off x="548640" y="6400800"/>
-            <a:ext cx="2743200" cy="201168"/>
-          </a:xfrm>
-          <a:prstGeom prst="rect">
-            <a:avLst/>
-          </a:prstGeom>
-          <a:noFill/>
-        </p:spPr>
-        <p:txBody>
-          <a:bodyPr wrap="none">
-            <a:spAutoFit/>
-          </a:bodyPr>
-          <a:lstStyle/>
-          <a:p>
-            <a:pPr>
-              <a:defRPr sz="1100">
-                <a:solidFill>
-                  <a:srgbClr val="004A7C"/>
-                </a:solidFill>
-                <a:latin typeface="Open Sans"/>
-              </a:defRPr>
-            </a:pPr>
-            <a:r>
-              <a:t>atelier IA 2026</a:t>
-            </a:r>
-          </a:p>
-        </p:txBody>
-      </p:sp>
+      <p:grpSp>
+        <p:nvGrpSpPr>
+          <p:cNvPr id="10" name="Group 9">
+            <a:extLst>
+              <a:ext uri="{FF2B5EF4-FFF2-40B4-BE49-F238E27FC236}">
+                <a16:creationId xmlns:a16="http://schemas.microsoft.com/office/drawing/2014/main" id="{723C66ED-DBBF-12CA-7F5E-813E0E7D036A}"/>
+              </a:ext>
+              <a:ext uri="{C183D7F6-B498-43B3-948B-1728B52AA6E4}">
+                <adec:decorative xmlns:adec="http://schemas.microsoft.com/office/drawing/2017/decorative" val="1"/>
+              </a:ext>
+            </a:extLst>
+          </p:cNvPr>
+          <p:cNvGrpSpPr>
+            <a:grpSpLocks noGrp="1" noUngrp="1" noRot="1" noChangeAspect="1" noMove="1" noResize="1"/>
+          </p:cNvGrpSpPr>
+          <p:nvPr>
+            <p:extLst>
+              <p:ext uri="{386F3935-93C4-4BCD-93E2-E3B085C9AB24}">
+                <p16:designElem xmlns:p16="http://schemas.microsoft.com/office/powerpoint/2015/main" val="1"/>
+              </p:ext>
+            </p:extLst>
+          </p:nvPr>
+        </p:nvGrpSpPr>
+        <p:grpSpPr>
+          <a:xfrm>
+            <a:off x="0" y="-7622"/>
+            <a:ext cx="12192000" cy="6894986"/>
+            <a:chOff x="0" y="-7622"/>
+            <a:chExt cx="12192000" cy="6894986"/>
+          </a:xfrm>
+        </p:grpSpPr>
+        <p:sp>
+          <p:nvSpPr>
+            <p:cNvPr id="11" name="Rectangle 10">
+              <a:extLst>
+                <a:ext uri="{FF2B5EF4-FFF2-40B4-BE49-F238E27FC236}">
+                  <a16:creationId xmlns:a16="http://schemas.microsoft.com/office/drawing/2014/main" id="{E3002B52-2669-1ED7-2E0F-0627FC31DFDC}"/>
+                </a:ext>
+                <a:ext uri="{C183D7F6-B498-43B3-948B-1728B52AA6E4}">
+                  <adec:decorative xmlns:adec="http://schemas.microsoft.com/office/drawing/2017/decorative" val="1"/>
+                </a:ext>
+              </a:extLst>
+            </p:cNvPr>
+            <p:cNvSpPr/>
+            <p:nvPr>
+              <p:extLst>
+                <p:ext uri="{386F3935-93C4-4BCD-93E2-E3B085C9AB24}">
+                  <p16:designElem xmlns:p16="http://schemas.microsoft.com/office/powerpoint/2015/main" val="1"/>
+                </p:ext>
+              </p:extLst>
+            </p:nvPr>
+          </p:nvSpPr>
+          <p:spPr>
+            <a:xfrm rot="10800000">
+              <a:off x="0" y="-7621"/>
+              <a:ext cx="12192000" cy="6887364"/>
+            </a:xfrm>
+            <a:prstGeom prst="rect">
+              <a:avLst/>
+            </a:prstGeom>
+            <a:gradFill>
+              <a:gsLst>
+                <a:gs pos="8000">
+                  <a:schemeClr val="accent5"/>
+                </a:gs>
+                <a:gs pos="100000">
+                  <a:schemeClr val="accent2"/>
+                </a:gs>
+              </a:gsLst>
+              <a:lin ang="4200000" scaled="0"/>
+            </a:gradFill>
+            <a:ln>
+              <a:noFill/>
+            </a:ln>
+          </p:spPr>
+          <p:style>
+            <a:lnRef idx="2">
+              <a:schemeClr val="accent1">
+                <a:shade val="50000"/>
+              </a:schemeClr>
+            </a:lnRef>
+            <a:fillRef idx="1">
+              <a:schemeClr val="accent1"/>
+            </a:fillRef>
+            <a:effectRef idx="0">
+              <a:schemeClr val="accent1"/>
+            </a:effectRef>
+            <a:fontRef idx="minor">
+              <a:schemeClr val="lt1"/>
+            </a:fontRef>
+          </p:style>
+          <p:txBody>
+            <a:bodyPr rtlCol="0" anchor="ctr"/>
+            <a:lstStyle/>
+            <a:p>
+              <a:pPr algn="ctr"/>
+              <a:endParaRPr lang="en-US" dirty="0"/>
+            </a:p>
+          </p:txBody>
+        </p:sp>
+        <p:sp>
+          <p:nvSpPr>
+            <p:cNvPr id="12" name="Rectangle 11">
+              <a:extLst>
+                <a:ext uri="{FF2B5EF4-FFF2-40B4-BE49-F238E27FC236}">
+                  <a16:creationId xmlns:a16="http://schemas.microsoft.com/office/drawing/2014/main" id="{82E9EC0D-91EA-9D35-F655-335C580AB3CB}"/>
+                </a:ext>
+                <a:ext uri="{C183D7F6-B498-43B3-948B-1728B52AA6E4}">
+                  <adec:decorative xmlns:adec="http://schemas.microsoft.com/office/drawing/2017/decorative" val="1"/>
+                </a:ext>
+              </a:extLst>
+            </p:cNvPr>
+            <p:cNvSpPr/>
+            <p:nvPr>
+              <p:extLst>
+                <p:ext uri="{386F3935-93C4-4BCD-93E2-E3B085C9AB24}">
+                  <p16:designElem xmlns:p16="http://schemas.microsoft.com/office/powerpoint/2015/main" val="1"/>
+                </p:ext>
+              </p:extLst>
+            </p:nvPr>
+          </p:nvSpPr>
+          <p:spPr>
+            <a:xfrm>
+              <a:off x="399" y="0"/>
+              <a:ext cx="8216919" cy="6887364"/>
+            </a:xfrm>
+            <a:prstGeom prst="rect">
+              <a:avLst/>
+            </a:prstGeom>
+            <a:gradFill flip="none" rotWithShape="1">
+              <a:gsLst>
+                <a:gs pos="0">
+                  <a:schemeClr val="accent5">
+                    <a:lumMod val="75000"/>
+                    <a:alpha val="79000"/>
+                  </a:schemeClr>
+                </a:gs>
+                <a:gs pos="40000">
+                  <a:schemeClr val="accent5">
+                    <a:lumMod val="60000"/>
+                    <a:lumOff val="40000"/>
+                    <a:alpha val="0"/>
+                  </a:schemeClr>
+                </a:gs>
+              </a:gsLst>
+              <a:lin ang="19200000" scaled="0"/>
+              <a:tileRect/>
+            </a:gradFill>
+            <a:ln>
+              <a:noFill/>
+            </a:ln>
+          </p:spPr>
+          <p:style>
+            <a:lnRef idx="2">
+              <a:schemeClr val="accent1">
+                <a:shade val="50000"/>
+              </a:schemeClr>
+            </a:lnRef>
+            <a:fillRef idx="1">
+              <a:schemeClr val="accent1"/>
+            </a:fillRef>
+            <a:effectRef idx="0">
+              <a:schemeClr val="accent1"/>
+            </a:effectRef>
+            <a:fontRef idx="minor">
+              <a:schemeClr val="lt1"/>
+            </a:fontRef>
+          </p:style>
+          <p:txBody>
+            <a:bodyPr rtlCol="0" anchor="ctr"/>
+            <a:lstStyle/>
+            <a:p>
+              <a:pPr algn="ctr"/>
+              <a:endParaRPr lang="en-US"/>
+            </a:p>
+          </p:txBody>
+        </p:sp>
+        <p:sp>
+          <p:nvSpPr>
+            <p:cNvPr id="13" name="Rectangle 12">
+              <a:extLst>
+                <a:ext uri="{FF2B5EF4-FFF2-40B4-BE49-F238E27FC236}">
+                  <a16:creationId xmlns:a16="http://schemas.microsoft.com/office/drawing/2014/main" id="{7770627C-B480-1145-72DC-5B59DBE04874}"/>
+                </a:ext>
+                <a:ext uri="{C183D7F6-B498-43B3-948B-1728B52AA6E4}">
+                  <adec:decorative xmlns:adec="http://schemas.microsoft.com/office/drawing/2017/decorative" val="1"/>
+                </a:ext>
+              </a:extLst>
+            </p:cNvPr>
+            <p:cNvSpPr/>
+            <p:nvPr>
+              <p:extLst>
+                <p:ext uri="{386F3935-93C4-4BCD-93E2-E3B085C9AB24}">
+                  <p16:designElem xmlns:p16="http://schemas.microsoft.com/office/powerpoint/2015/main" val="1"/>
+                </p:ext>
+              </p:extLst>
+            </p:nvPr>
+          </p:nvSpPr>
+          <p:spPr>
+            <a:xfrm>
+              <a:off x="3739978" y="-7622"/>
+              <a:ext cx="8451623" cy="6887367"/>
+            </a:xfrm>
+            <a:prstGeom prst="rect">
+              <a:avLst/>
+            </a:prstGeom>
+            <a:gradFill>
+              <a:gsLst>
+                <a:gs pos="0">
+                  <a:schemeClr val="accent5">
+                    <a:lumMod val="75000"/>
+                    <a:alpha val="67000"/>
+                  </a:schemeClr>
+                </a:gs>
+                <a:gs pos="60000">
+                  <a:schemeClr val="accent5">
+                    <a:alpha val="0"/>
+                  </a:schemeClr>
+                </a:gs>
+              </a:gsLst>
+              <a:lin ang="11400000" scaled="0"/>
+            </a:gradFill>
+            <a:ln>
+              <a:noFill/>
+            </a:ln>
+          </p:spPr>
+          <p:style>
+            <a:lnRef idx="2">
+              <a:schemeClr val="accent1">
+                <a:shade val="50000"/>
+              </a:schemeClr>
+            </a:lnRef>
+            <a:fillRef idx="1">
+              <a:schemeClr val="accent1"/>
+            </a:fillRef>
+            <a:effectRef idx="0">
+              <a:schemeClr val="accent1"/>
+            </a:effectRef>
+            <a:fontRef idx="minor">
+              <a:schemeClr val="lt1"/>
+            </a:fontRef>
+          </p:style>
+          <p:txBody>
+            <a:bodyPr rtlCol="0" anchor="ctr"/>
+            <a:lstStyle/>
+            <a:p>
+              <a:pPr algn="ctr"/>
+              <a:endParaRPr lang="en-US"/>
+            </a:p>
+          </p:txBody>
+        </p:sp>
+        <p:sp>
+          <p:nvSpPr>
+            <p:cNvPr id="14" name="Rectangle 13">
+              <a:extLst>
+                <a:ext uri="{FF2B5EF4-FFF2-40B4-BE49-F238E27FC236}">
+                  <a16:creationId xmlns:a16="http://schemas.microsoft.com/office/drawing/2014/main" id="{E9F81D39-93D1-019C-74DC-4710F5334637}"/>
+                </a:ext>
+                <a:ext uri="{C183D7F6-B498-43B3-948B-1728B52AA6E4}">
+                  <adec:decorative xmlns:adec="http://schemas.microsoft.com/office/drawing/2017/decorative" val="1"/>
+                </a:ext>
+              </a:extLst>
+            </p:cNvPr>
+            <p:cNvSpPr/>
+            <p:nvPr>
+              <p:extLst>
+                <p:ext uri="{386F3935-93C4-4BCD-93E2-E3B085C9AB24}">
+                  <p16:designElem xmlns:p16="http://schemas.microsoft.com/office/powerpoint/2015/main" val="1"/>
+                </p:ext>
+              </p:extLst>
+            </p:nvPr>
+          </p:nvSpPr>
+          <p:spPr>
+            <a:xfrm rot="10800000">
+              <a:off x="9127281" y="7060"/>
+              <a:ext cx="3064320" cy="6872683"/>
+            </a:xfrm>
+            <a:prstGeom prst="rect">
+              <a:avLst/>
+            </a:prstGeom>
+            <a:gradFill flip="none" rotWithShape="1">
+              <a:gsLst>
+                <a:gs pos="0">
+                  <a:schemeClr val="accent2">
+                    <a:alpha val="58000"/>
+                  </a:schemeClr>
+                </a:gs>
+                <a:gs pos="41000">
+                  <a:schemeClr val="accent2">
+                    <a:alpha val="0"/>
+                  </a:schemeClr>
+                </a:gs>
+              </a:gsLst>
+              <a:lin ang="1200000" scaled="0"/>
+              <a:tileRect/>
+            </a:gradFill>
+            <a:ln w="12700" cap="flat" cmpd="sng" algn="ctr">
+              <a:noFill/>
+              <a:prstDash val="solid"/>
+              <a:miter lim="800000"/>
+            </a:ln>
+            <a:effectLst/>
+          </p:spPr>
+          <p:style>
+            <a:lnRef idx="2">
+              <a:schemeClr val="accent1">
+                <a:shade val="50000"/>
+              </a:schemeClr>
+            </a:lnRef>
+            <a:fillRef idx="1">
+              <a:schemeClr val="accent1"/>
+            </a:fillRef>
+            <a:effectRef idx="0">
+              <a:schemeClr val="accent1"/>
+            </a:effectRef>
+            <a:fontRef idx="minor">
+              <a:schemeClr val="lt1"/>
+            </a:fontRef>
+          </p:style>
+          <p:txBody>
+            <a:bodyPr rtlCol="0" anchor="ctr"/>
+            <a:lstStyle/>
+            <a:p>
+              <a:pPr algn="r"/>
+              <a:endParaRPr lang="en-US"/>
+            </a:p>
+          </p:txBody>
+        </p:sp>
+      </p:grpSp>
+      <p:pic>
+        <p:nvPicPr>
+          <p:cNvPr id="5" name="Espace réservé du contenu 4">
+            <a:extLst>
+              <a:ext uri="{FF2B5EF4-FFF2-40B4-BE49-F238E27FC236}">
+                <a16:creationId xmlns:a16="http://schemas.microsoft.com/office/drawing/2014/main" id="{D9CA26EA-9D67-6D7C-D287-E11FA907468F}"/>
+              </a:ext>
+            </a:extLst>
+          </p:cNvPr>
+          <p:cNvPicPr>
+            <a:picLocks noGrp="1" noChangeAspect="1"/>
+          </p:cNvPicPr>
+          <p:nvPr>
+            <p:ph idx="1"/>
+          </p:nvPr>
+        </p:nvPicPr>
+        <p:blipFill>
+          <a:blip r:embed="rId2">
+            <a:alphaModFix amt="59000"/>
+          </a:blip>
+          <a:srcRect r="1311"/>
+          <a:stretch>
+            <a:fillRect/>
+          </a:stretch>
+        </p:blipFill>
+        <p:spPr>
+          <a:xfrm>
+            <a:off x="20" y="-7624"/>
+            <a:ext cx="12191981" cy="6887365"/>
+          </a:xfrm>
+          <a:prstGeom prst="rect">
+            <a:avLst/>
+          </a:prstGeom>
+        </p:spPr>
+      </p:pic>
     </p:spTree>
+    <p:extLst>
+      <p:ext uri="{BB962C8B-B14F-4D97-AF65-F5344CB8AC3E}">
+        <p14:creationId xmlns:p14="http://schemas.microsoft.com/office/powerpoint/2010/main" val="2219256093"/>
+      </p:ext>
+    </p:extLst>
   </p:cSld>
   <p:clrMapOvr>
     <a:masterClrMapping/>
@@ -5345,7 +5608,7 @@
                 </a:solidFill>
                 <a:latin typeface="Montserrat"/>
               </a:rPr>
-              <a:t>Objectif de l’atelier</a:t>
+              <a:t>Question d’accroche</a:t>
             </a:r>
           </a:p>
         </p:txBody>
@@ -5358,8 +5621,8 @@
         </p:nvSpPr>
         <p:spPr>
           <a:xfrm>
-            <a:off x="868680" y="1143000"/>
-            <a:ext cx="10424160" cy="457200"/>
+            <a:off x="914400" y="1234440"/>
+            <a:ext cx="10332720" cy="594360"/>
           </a:xfrm>
           <a:prstGeom prst="rect">
             <a:avLst/>
@@ -5374,13 +5637,13 @@
           <a:p>
             <a:pPr algn="ctr"/>
             <a:r>
-              <a:rPr sz="2400" b="1">
+              <a:rPr sz="2200" b="1">
                 <a:solidFill>
                   <a:srgbClr val="004A7C"/>
                 </a:solidFill>
                 <a:latin typeface="Open Sans"/>
               </a:rPr>
-              <a:t>Aujourd’hui vous allez :</a:t>
+              <a:t>Combien de temps vous faut-il pour préparer une séance complète ?</a:t>
             </a:r>
           </a:p>
         </p:txBody>
@@ -5393,8 +5656,8 @@
         </p:nvSpPr>
         <p:spPr>
           <a:xfrm>
-            <a:off x="548640" y="1965960"/>
-            <a:ext cx="2560320" cy="2057400"/>
+            <a:off x="868680" y="2011680"/>
+            <a:ext cx="3383280" cy="1554480"/>
           </a:xfrm>
           <a:prstGeom prst="roundRect">
             <a:avLst/>
@@ -5433,60 +5696,14 @@
       </p:sp>
       <p:sp>
         <p:nvSpPr>
-          <p:cNvPr id="5" name="Rounded Rectangle 4"/>
-          <p:cNvSpPr/>
-          <p:nvPr/>
-        </p:nvSpPr>
-        <p:spPr>
-          <a:xfrm>
-            <a:off x="1463040" y="2057400"/>
-            <a:ext cx="594360" cy="594360"/>
-          </a:xfrm>
-          <a:prstGeom prst="roundRect">
-            <a:avLst/>
-          </a:prstGeom>
-          <a:solidFill>
-            <a:srgbClr val="F36C21"/>
-          </a:solidFill>
-          <a:ln>
-            <a:solidFill>
-              <a:srgbClr val="F36C21"/>
-            </a:solidFill>
-          </a:ln>
-        </p:spPr>
-        <p:style>
-          <a:lnRef idx="1">
-            <a:schemeClr val="accent1"/>
-          </a:lnRef>
-          <a:fillRef idx="3">
-            <a:schemeClr val="accent1"/>
-          </a:fillRef>
-          <a:effectRef idx="2">
-            <a:schemeClr val="accent1"/>
-          </a:effectRef>
-          <a:fontRef idx="minor">
-            <a:schemeClr val="lt1"/>
-          </a:fontRef>
-        </p:style>
-        <p:txBody>
-          <a:bodyPr rtlCol="0" anchor="ctr"/>
-          <a:lstStyle/>
-          <a:p>
-            <a:pPr algn="ctr"/>
-            <a:endParaRPr/>
-          </a:p>
-        </p:txBody>
-      </p:sp>
-      <p:sp>
-        <p:nvSpPr>
-          <p:cNvPr id="6" name="TextBox 5"/>
+          <p:cNvPr id="5" name="TextBox 4"/>
           <p:cNvSpPr txBox="1"/>
           <p:nvPr/>
         </p:nvSpPr>
         <p:spPr>
           <a:xfrm>
-            <a:off x="1463040" y="2176272"/>
-            <a:ext cx="594360" cy="182880"/>
+            <a:off x="868680" y="2212848"/>
+            <a:ext cx="3383280" cy="274320"/>
           </a:xfrm>
           <a:prstGeom prst="rect">
             <a:avLst/>
@@ -5501,27 +5718,27 @@
           <a:p>
             <a:pPr algn="ctr"/>
             <a:r>
-              <a:rPr sz="1600" b="1">
-                <a:solidFill>
-                  <a:srgbClr val="FFFFFF"/>
+              <a:rPr sz="2800" b="0">
+                <a:solidFill>
+                  <a:srgbClr val="F36C21"/>
                 </a:solidFill>
                 <a:latin typeface="Open Sans"/>
               </a:rPr>
-              <a:t>1</a:t>
-            </a:r>
-          </a:p>
-        </p:txBody>
-      </p:sp>
-      <p:sp>
-        <p:nvSpPr>
-          <p:cNvPr id="7" name="TextBox 6"/>
+              <a:t>⏱️</a:t>
+            </a:r>
+          </a:p>
+        </p:txBody>
+      </p:sp>
+      <p:sp>
+        <p:nvSpPr>
+          <p:cNvPr id="6" name="TextBox 5"/>
           <p:cNvSpPr txBox="1"/>
           <p:nvPr/>
         </p:nvSpPr>
         <p:spPr>
           <a:xfrm>
-            <a:off x="658368" y="2743200"/>
-            <a:ext cx="2331720" cy="685800"/>
+            <a:off x="941832" y="2624328"/>
+            <a:ext cx="3246120" cy="384048"/>
           </a:xfrm>
           <a:prstGeom prst="rect">
             <a:avLst/>
@@ -5536,27 +5753,27 @@
           <a:p>
             <a:pPr algn="ctr"/>
             <a:r>
-              <a:rPr sz="1400" b="0">
-                <a:solidFill>
-                  <a:srgbClr val="222222"/>
+              <a:rPr sz="1900" b="1">
+                <a:solidFill>
+                  <a:srgbClr val="F36C21"/>
                 </a:solidFill>
                 <a:latin typeface="Open Sans"/>
               </a:rPr>
-              <a:t>Construire une activité</a:t>
-            </a:r>
-          </a:p>
-        </p:txBody>
-      </p:sp>
-      <p:sp>
-        <p:nvSpPr>
-          <p:cNvPr id="8" name="Rounded Rectangle 7"/>
+              <a:t>1h</a:t>
+            </a:r>
+          </a:p>
+        </p:txBody>
+      </p:sp>
+      <p:sp>
+        <p:nvSpPr>
+          <p:cNvPr id="7" name="Rounded Rectangle 6"/>
           <p:cNvSpPr/>
           <p:nvPr/>
         </p:nvSpPr>
         <p:spPr>
           <a:xfrm>
-            <a:off x="3383280" y="1965960"/>
-            <a:ext cx="2560320" cy="2057400"/>
+            <a:off x="4617720" y="2011680"/>
+            <a:ext cx="3383280" cy="1554480"/>
           </a:xfrm>
           <a:prstGeom prst="roundRect">
             <a:avLst/>
@@ -5595,60 +5812,14 @@
       </p:sp>
       <p:sp>
         <p:nvSpPr>
-          <p:cNvPr id="9" name="Rounded Rectangle 8"/>
-          <p:cNvSpPr/>
-          <p:nvPr/>
-        </p:nvSpPr>
-        <p:spPr>
-          <a:xfrm>
-            <a:off x="4297680" y="2057400"/>
-            <a:ext cx="594360" cy="594360"/>
-          </a:xfrm>
-          <a:prstGeom prst="roundRect">
-            <a:avLst/>
-          </a:prstGeom>
-          <a:solidFill>
-            <a:srgbClr val="004A7C"/>
-          </a:solidFill>
-          <a:ln>
-            <a:solidFill>
-              <a:srgbClr val="004A7C"/>
-            </a:solidFill>
-          </a:ln>
-        </p:spPr>
-        <p:style>
-          <a:lnRef idx="1">
-            <a:schemeClr val="accent1"/>
-          </a:lnRef>
-          <a:fillRef idx="3">
-            <a:schemeClr val="accent1"/>
-          </a:fillRef>
-          <a:effectRef idx="2">
-            <a:schemeClr val="accent1"/>
-          </a:effectRef>
-          <a:fontRef idx="minor">
-            <a:schemeClr val="lt1"/>
-          </a:fontRef>
-        </p:style>
-        <p:txBody>
-          <a:bodyPr rtlCol="0" anchor="ctr"/>
-          <a:lstStyle/>
-          <a:p>
-            <a:pPr algn="ctr"/>
-            <a:endParaRPr/>
-          </a:p>
-        </p:txBody>
-      </p:sp>
-      <p:sp>
-        <p:nvSpPr>
-          <p:cNvPr id="10" name="TextBox 9"/>
+          <p:cNvPr id="8" name="TextBox 7"/>
           <p:cNvSpPr txBox="1"/>
           <p:nvPr/>
         </p:nvSpPr>
         <p:spPr>
           <a:xfrm>
-            <a:off x="4297680" y="2176272"/>
-            <a:ext cx="594360" cy="182880"/>
+            <a:off x="4617720" y="2212848"/>
+            <a:ext cx="3383280" cy="274320"/>
           </a:xfrm>
           <a:prstGeom prst="rect">
             <a:avLst/>
@@ -5663,27 +5834,27 @@
           <a:p>
             <a:pPr algn="ctr"/>
             <a:r>
-              <a:rPr sz="1600" b="1">
-                <a:solidFill>
-                  <a:srgbClr val="FFFFFF"/>
+              <a:rPr sz="2800" b="0">
+                <a:solidFill>
+                  <a:srgbClr val="004A7C"/>
                 </a:solidFill>
                 <a:latin typeface="Open Sans"/>
               </a:rPr>
-              <a:t>2</a:t>
-            </a:r>
-          </a:p>
-        </p:txBody>
-      </p:sp>
-      <p:sp>
-        <p:nvSpPr>
-          <p:cNvPr id="11" name="TextBox 10"/>
+              <a:t>⏱️</a:t>
+            </a:r>
+          </a:p>
+        </p:txBody>
+      </p:sp>
+      <p:sp>
+        <p:nvSpPr>
+          <p:cNvPr id="9" name="TextBox 8"/>
           <p:cNvSpPr txBox="1"/>
           <p:nvPr/>
         </p:nvSpPr>
         <p:spPr>
           <a:xfrm>
-            <a:off x="3493008" y="2743200"/>
-            <a:ext cx="2331720" cy="685800"/>
+            <a:off x="4690872" y="2624328"/>
+            <a:ext cx="3246120" cy="384048"/>
           </a:xfrm>
           <a:prstGeom prst="rect">
             <a:avLst/>
@@ -5698,27 +5869,27 @@
           <a:p>
             <a:pPr algn="ctr"/>
             <a:r>
-              <a:rPr sz="1400" b="0">
-                <a:solidFill>
-                  <a:srgbClr val="222222"/>
+              <a:rPr sz="1900" b="1">
+                <a:solidFill>
+                  <a:srgbClr val="004A7C"/>
                 </a:solidFill>
                 <a:latin typeface="Open Sans"/>
               </a:rPr>
-              <a:t>La différencier</a:t>
-            </a:r>
-          </a:p>
-        </p:txBody>
-      </p:sp>
-      <p:sp>
-        <p:nvSpPr>
-          <p:cNvPr id="12" name="Rounded Rectangle 11"/>
+              <a:t>2h</a:t>
+            </a:r>
+          </a:p>
+        </p:txBody>
+      </p:sp>
+      <p:sp>
+        <p:nvSpPr>
+          <p:cNvPr id="10" name="Rounded Rectangle 9"/>
           <p:cNvSpPr/>
           <p:nvPr/>
         </p:nvSpPr>
         <p:spPr>
           <a:xfrm>
-            <a:off x="6217920" y="1965960"/>
-            <a:ext cx="2560320" cy="2057400"/>
+            <a:off x="8366759" y="2011680"/>
+            <a:ext cx="3383280" cy="1554480"/>
           </a:xfrm>
           <a:prstGeom prst="roundRect">
             <a:avLst/>
@@ -5757,24 +5928,94 @@
       </p:sp>
       <p:sp>
         <p:nvSpPr>
+          <p:cNvPr id="11" name="TextBox 10"/>
+          <p:cNvSpPr txBox="1"/>
+          <p:nvPr/>
+        </p:nvSpPr>
+        <p:spPr>
+          <a:xfrm>
+            <a:off x="8366759" y="2212848"/>
+            <a:ext cx="3383280" cy="274320"/>
+          </a:xfrm>
+          <a:prstGeom prst="rect">
+            <a:avLst/>
+          </a:prstGeom>
+          <a:noFill/>
+        </p:spPr>
+        <p:txBody>
+          <a:bodyPr wrap="square" anchor="ctr">
+            <a:spAutoFit/>
+          </a:bodyPr>
+          <a:lstStyle/>
+          <a:p>
+            <a:pPr algn="ctr"/>
+            <a:r>
+              <a:rPr sz="2800" b="0">
+                <a:solidFill>
+                  <a:srgbClr val="222222"/>
+                </a:solidFill>
+                <a:latin typeface="Open Sans"/>
+              </a:rPr>
+              <a:t>⏱️</a:t>
+            </a:r>
+          </a:p>
+        </p:txBody>
+      </p:sp>
+      <p:sp>
+        <p:nvSpPr>
+          <p:cNvPr id="12" name="TextBox 11"/>
+          <p:cNvSpPr txBox="1"/>
+          <p:nvPr/>
+        </p:nvSpPr>
+        <p:spPr>
+          <a:xfrm>
+            <a:off x="8439911" y="2624328"/>
+            <a:ext cx="3246120" cy="384048"/>
+          </a:xfrm>
+          <a:prstGeom prst="rect">
+            <a:avLst/>
+          </a:prstGeom>
+          <a:noFill/>
+        </p:spPr>
+        <p:txBody>
+          <a:bodyPr wrap="square" anchor="ctr">
+            <a:spAutoFit/>
+          </a:bodyPr>
+          <a:lstStyle/>
+          <a:p>
+            <a:pPr algn="ctr"/>
+            <a:r>
+              <a:rPr sz="1900" b="1">
+                <a:solidFill>
+                  <a:srgbClr val="222222"/>
+                </a:solidFill>
+                <a:latin typeface="Open Sans"/>
+              </a:rPr>
+              <a:t>Parfois davantage</a:t>
+            </a:r>
+          </a:p>
+        </p:txBody>
+      </p:sp>
+      <p:sp>
+        <p:nvSpPr>
           <p:cNvPr id="13" name="Rounded Rectangle 12"/>
           <p:cNvSpPr/>
           <p:nvPr/>
         </p:nvSpPr>
         <p:spPr>
           <a:xfrm>
-            <a:off x="7132320" y="2057400"/>
-            <a:ext cx="594360" cy="594360"/>
+            <a:off x="1097280" y="4160520"/>
+            <a:ext cx="10012680" cy="713232"/>
           </a:xfrm>
           <a:prstGeom prst="roundRect">
             <a:avLst/>
           </a:prstGeom>
           <a:solidFill>
-            <a:srgbClr val="8F8F8F"/>
+            <a:srgbClr val="ECECEC"/>
           </a:solidFill>
           <a:ln>
             <a:solidFill>
-              <a:srgbClr val="8F8F8F"/>
+              <a:srgbClr val="ECECEC"/>
             </a:solidFill>
           </a:ln>
         </p:spPr>
@@ -5809,8 +6050,8 @@
         </p:nvSpPr>
         <p:spPr>
           <a:xfrm>
-            <a:off x="7132320" y="2176272"/>
-            <a:ext cx="594360" cy="182880"/>
+            <a:off x="1325880" y="4379976"/>
+            <a:ext cx="9555480" cy="201168"/>
           </a:xfrm>
           <a:prstGeom prst="rect">
             <a:avLst/>
@@ -5825,217 +6066,20 @@
           <a:p>
             <a:pPr algn="ctr"/>
             <a:r>
-              <a:rPr sz="1600" b="1">
-                <a:solidFill>
-                  <a:srgbClr val="FFFFFF"/>
+              <a:rPr sz="1800" b="0">
+                <a:solidFill>
+                  <a:srgbClr val="222222"/>
                 </a:solidFill>
                 <a:latin typeface="Open Sans"/>
               </a:rPr>
-              <a:t>3</a:t>
-            </a:r>
-          </a:p>
-        </p:txBody>
-      </p:sp>
-      <p:sp>
-        <p:nvSpPr>
-          <p:cNvPr id="15" name="TextBox 14"/>
-          <p:cNvSpPr txBox="1"/>
-          <p:nvPr/>
-        </p:nvSpPr>
-        <p:spPr>
-          <a:xfrm>
-            <a:off x="6327648" y="2743200"/>
-            <a:ext cx="2331720" cy="685800"/>
-          </a:xfrm>
-          <a:prstGeom prst="rect">
-            <a:avLst/>
-          </a:prstGeom>
-          <a:noFill/>
-        </p:spPr>
-        <p:txBody>
-          <a:bodyPr wrap="square" anchor="ctr">
-            <a:spAutoFit/>
-          </a:bodyPr>
-          <a:lstStyle/>
-          <a:p>
-            <a:pPr algn="ctr"/>
-            <a:r>
-              <a:rPr sz="1400" b="0">
-                <a:solidFill>
-                  <a:srgbClr val="222222"/>
-                </a:solidFill>
-                <a:latin typeface="Open Sans"/>
-              </a:rPr>
-              <a:t>Créer une évaluation</a:t>
-            </a:r>
-          </a:p>
-        </p:txBody>
-      </p:sp>
-      <p:sp>
-        <p:nvSpPr>
-          <p:cNvPr id="16" name="Rounded Rectangle 15"/>
-          <p:cNvSpPr/>
-          <p:nvPr/>
-        </p:nvSpPr>
-        <p:spPr>
-          <a:xfrm>
-            <a:off x="9052560" y="1965960"/>
-            <a:ext cx="2560320" cy="2057400"/>
-          </a:xfrm>
-          <a:prstGeom prst="roundRect">
-            <a:avLst/>
-          </a:prstGeom>
-          <a:solidFill>
-            <a:srgbClr val="FFFFFF"/>
-          </a:solidFill>
-          <a:ln>
-            <a:solidFill>
-              <a:srgbClr val="D9D9D9"/>
-            </a:solidFill>
-          </a:ln>
-        </p:spPr>
-        <p:style>
-          <a:lnRef idx="1">
-            <a:schemeClr val="accent1"/>
-          </a:lnRef>
-          <a:fillRef idx="3">
-            <a:schemeClr val="accent1"/>
-          </a:fillRef>
-          <a:effectRef idx="2">
-            <a:schemeClr val="accent1"/>
-          </a:effectRef>
-          <a:fontRef idx="minor">
-            <a:schemeClr val="lt1"/>
-          </a:fontRef>
-        </p:style>
-        <p:txBody>
-          <a:bodyPr rtlCol="0" anchor="ctr"/>
-          <a:lstStyle/>
-          <a:p>
-            <a:pPr algn="ctr"/>
-            <a:endParaRPr/>
-          </a:p>
-        </p:txBody>
-      </p:sp>
-      <p:sp>
-        <p:nvSpPr>
-          <p:cNvPr id="17" name="Rounded Rectangle 16"/>
-          <p:cNvSpPr/>
-          <p:nvPr/>
-        </p:nvSpPr>
-        <p:spPr>
-          <a:xfrm>
-            <a:off x="9966960" y="2057400"/>
-            <a:ext cx="594360" cy="594360"/>
-          </a:xfrm>
-          <a:prstGeom prst="roundRect">
-            <a:avLst/>
-          </a:prstGeom>
-          <a:solidFill>
-            <a:srgbClr val="F36C21"/>
-          </a:solidFill>
-          <a:ln>
-            <a:solidFill>
-              <a:srgbClr val="F36C21"/>
-            </a:solidFill>
-          </a:ln>
-        </p:spPr>
-        <p:style>
-          <a:lnRef idx="1">
-            <a:schemeClr val="accent1"/>
-          </a:lnRef>
-          <a:fillRef idx="3">
-            <a:schemeClr val="accent1"/>
-          </a:fillRef>
-          <a:effectRef idx="2">
-            <a:schemeClr val="accent1"/>
-          </a:effectRef>
-          <a:fontRef idx="minor">
-            <a:schemeClr val="lt1"/>
-          </a:fontRef>
-        </p:style>
-        <p:txBody>
-          <a:bodyPr rtlCol="0" anchor="ctr"/>
-          <a:lstStyle/>
-          <a:p>
-            <a:pPr algn="ctr"/>
-            <a:endParaRPr/>
-          </a:p>
-        </p:txBody>
-      </p:sp>
-      <p:sp>
-        <p:nvSpPr>
-          <p:cNvPr id="18" name="TextBox 17"/>
-          <p:cNvSpPr txBox="1"/>
-          <p:nvPr/>
-        </p:nvSpPr>
-        <p:spPr>
-          <a:xfrm>
-            <a:off x="9966960" y="2176272"/>
-            <a:ext cx="594360" cy="182880"/>
-          </a:xfrm>
-          <a:prstGeom prst="rect">
-            <a:avLst/>
-          </a:prstGeom>
-          <a:noFill/>
-        </p:spPr>
-        <p:txBody>
-          <a:bodyPr wrap="square" anchor="ctr">
-            <a:spAutoFit/>
-          </a:bodyPr>
-          <a:lstStyle/>
-          <a:p>
-            <a:pPr algn="ctr"/>
-            <a:r>
-              <a:rPr sz="1600" b="1">
-                <a:solidFill>
-                  <a:srgbClr val="FFFFFF"/>
-                </a:solidFill>
-                <a:latin typeface="Open Sans"/>
-              </a:rPr>
-              <a:t>4</a:t>
-            </a:r>
-          </a:p>
-        </p:txBody>
-      </p:sp>
-      <p:sp>
-        <p:nvSpPr>
-          <p:cNvPr id="19" name="TextBox 18"/>
-          <p:cNvSpPr txBox="1"/>
-          <p:nvPr/>
-        </p:nvSpPr>
-        <p:spPr>
-          <a:xfrm>
-            <a:off x="9162288" y="2743200"/>
-            <a:ext cx="2331720" cy="685800"/>
-          </a:xfrm>
-          <a:prstGeom prst="rect">
-            <a:avLst/>
-          </a:prstGeom>
-          <a:noFill/>
-        </p:spPr>
-        <p:txBody>
-          <a:bodyPr wrap="square" anchor="ctr">
-            <a:spAutoFit/>
-          </a:bodyPr>
-          <a:lstStyle/>
-          <a:p>
-            <a:pPr algn="ctr"/>
-            <a:r>
-              <a:rPr sz="1400" b="0">
-                <a:solidFill>
-                  <a:srgbClr val="222222"/>
-                </a:solidFill>
-                <a:latin typeface="Open Sans"/>
-              </a:rPr>
-              <a:t>Repartir avec une ressource prête à utiliser</a:t>
-            </a:r>
-          </a:p>
-        </p:txBody>
-      </p:sp>
-      <p:sp>
-        <p:nvSpPr>
-          <p:cNvPr id="20" name="Rectangle 19"/>
+              <a:t>Et si nous pouvions réduire ce temps tout en améliorant la différenciation ?</a:t>
+            </a:r>
+          </a:p>
+        </p:txBody>
+      </p:sp>
+      <p:sp>
+        <p:nvSpPr>
+          <p:cNvPr id="15" name="Rectangle 14"/>
           <p:cNvSpPr/>
           <p:nvPr/>
         </p:nvSpPr>
@@ -6079,7 +6123,7 @@
       </p:sp>
       <p:sp>
         <p:nvSpPr>
-          <p:cNvPr id="21" name="TextBox 20"/>
+          <p:cNvPr id="16" name="TextBox 15"/>
           <p:cNvSpPr txBox="1"/>
           <p:nvPr/>
         </p:nvSpPr>
@@ -6113,6 +6157,36 @@
           </a:p>
         </p:txBody>
       </p:sp>
+      <p:pic>
+        <p:nvPicPr>
+          <p:cNvPr id="17" name="Image 16">
+            <a:extLst>
+              <a:ext uri="{FF2B5EF4-FFF2-40B4-BE49-F238E27FC236}">
+                <a16:creationId xmlns:a16="http://schemas.microsoft.com/office/drawing/2014/main" id="{EA3CFF0F-3BE0-E17A-6AE4-48524FFCBFBC}"/>
+              </a:ext>
+            </a:extLst>
+          </p:cNvPr>
+          <p:cNvPicPr>
+            <a:picLocks noChangeAspect="1"/>
+          </p:cNvPicPr>
+          <p:nvPr/>
+        </p:nvPicPr>
+        <p:blipFill>
+          <a:blip r:embed="rId2"/>
+          <a:stretch>
+            <a:fillRect/>
+          </a:stretch>
+        </p:blipFill>
+        <p:spPr>
+          <a:xfrm>
+            <a:off x="11124914" y="5976856"/>
+            <a:ext cx="1036891" cy="847888"/>
+          </a:xfrm>
+          <a:prstGeom prst="rect">
+            <a:avLst/>
+          </a:prstGeom>
+        </p:spPr>
+      </p:pic>
     </p:spTree>
   </p:cSld>
   <p:clrMapOvr>
@@ -6175,21 +6249,102 @@
                 </a:solidFill>
                 <a:latin typeface="Montserrat"/>
               </a:rPr>
-              <a:t>Les 3 usages les plus rentables</a:t>
-            </a:r>
-          </a:p>
-        </p:txBody>
-      </p:sp>
-      <p:sp>
-        <p:nvSpPr>
-          <p:cNvPr id="3" name="Rounded Rectangle 2"/>
+              <a:t>Objectif de l’atelier</a:t>
+            </a:r>
+          </a:p>
+        </p:txBody>
+      </p:sp>
+      <p:sp>
+        <p:nvSpPr>
+          <p:cNvPr id="3" name="TextBox 2"/>
+          <p:cNvSpPr txBox="1"/>
+          <p:nvPr/>
+        </p:nvSpPr>
+        <p:spPr>
+          <a:xfrm>
+            <a:off x="868680" y="1143000"/>
+            <a:ext cx="10424160" cy="457200"/>
+          </a:xfrm>
+          <a:prstGeom prst="rect">
+            <a:avLst/>
+          </a:prstGeom>
+          <a:noFill/>
+        </p:spPr>
+        <p:txBody>
+          <a:bodyPr wrap="square" anchor="ctr">
+            <a:spAutoFit/>
+          </a:bodyPr>
+          <a:lstStyle/>
+          <a:p>
+            <a:pPr algn="ctr"/>
+            <a:r>
+              <a:rPr sz="2400" b="1">
+                <a:solidFill>
+                  <a:srgbClr val="004A7C"/>
+                </a:solidFill>
+                <a:latin typeface="Open Sans"/>
+              </a:rPr>
+              <a:t>Aujourd’hui vous allez :</a:t>
+            </a:r>
+          </a:p>
+        </p:txBody>
+      </p:sp>
+      <p:sp>
+        <p:nvSpPr>
+          <p:cNvPr id="4" name="Rounded Rectangle 3"/>
           <p:cNvSpPr/>
           <p:nvPr/>
         </p:nvSpPr>
         <p:spPr>
           <a:xfrm>
-            <a:off x="868680" y="1828800"/>
-            <a:ext cx="2880360" cy="2468880"/>
+            <a:off x="548640" y="1965960"/>
+            <a:ext cx="2560320" cy="2057400"/>
+          </a:xfrm>
+          <a:prstGeom prst="roundRect">
+            <a:avLst/>
+          </a:prstGeom>
+          <a:solidFill>
+            <a:srgbClr val="FFFFFF"/>
+          </a:solidFill>
+          <a:ln>
+            <a:solidFill>
+              <a:srgbClr val="D9D9D9"/>
+            </a:solidFill>
+          </a:ln>
+        </p:spPr>
+        <p:style>
+          <a:lnRef idx="1">
+            <a:schemeClr val="accent1"/>
+          </a:lnRef>
+          <a:fillRef idx="3">
+            <a:schemeClr val="accent1"/>
+          </a:fillRef>
+          <a:effectRef idx="2">
+            <a:schemeClr val="accent1"/>
+          </a:effectRef>
+          <a:fontRef idx="minor">
+            <a:schemeClr val="lt1"/>
+          </a:fontRef>
+        </p:style>
+        <p:txBody>
+          <a:bodyPr rtlCol="0" anchor="ctr"/>
+          <a:lstStyle/>
+          <a:p>
+            <a:pPr algn="ctr"/>
+            <a:endParaRPr/>
+          </a:p>
+        </p:txBody>
+      </p:sp>
+      <p:sp>
+        <p:nvSpPr>
+          <p:cNvPr id="5" name="Rounded Rectangle 4"/>
+          <p:cNvSpPr/>
+          <p:nvPr/>
+        </p:nvSpPr>
+        <p:spPr>
+          <a:xfrm>
+            <a:off x="1463040" y="2057400"/>
+            <a:ext cx="594360" cy="594360"/>
           </a:xfrm>
           <a:prstGeom prst="roundRect">
             <a:avLst/>
@@ -6228,14 +6383,14 @@
       </p:sp>
       <p:sp>
         <p:nvSpPr>
-          <p:cNvPr id="4" name="TextBox 3"/>
+          <p:cNvPr id="6" name="TextBox 5"/>
           <p:cNvSpPr txBox="1"/>
           <p:nvPr/>
         </p:nvSpPr>
         <p:spPr>
           <a:xfrm>
-            <a:off x="868680" y="2194560"/>
-            <a:ext cx="2880360" cy="411480"/>
+            <a:off x="1463040" y="2176272"/>
+            <a:ext cx="594360" cy="182880"/>
           </a:xfrm>
           <a:prstGeom prst="rect">
             <a:avLst/>
@@ -6250,27 +6405,27 @@
           <a:p>
             <a:pPr algn="ctr"/>
             <a:r>
-              <a:rPr sz="2200" b="1">
+              <a:rPr sz="1600" b="1">
                 <a:solidFill>
                   <a:srgbClr val="FFFFFF"/>
                 </a:solidFill>
                 <a:latin typeface="Open Sans"/>
               </a:rPr>
-              <a:t>Préparer</a:t>
-            </a:r>
-          </a:p>
-        </p:txBody>
-      </p:sp>
-      <p:sp>
-        <p:nvSpPr>
-          <p:cNvPr id="5" name="TextBox 4"/>
+              <a:t>1</a:t>
+            </a:r>
+          </a:p>
+        </p:txBody>
+      </p:sp>
+      <p:sp>
+        <p:nvSpPr>
+          <p:cNvPr id="7" name="TextBox 6"/>
           <p:cNvSpPr txBox="1"/>
           <p:nvPr/>
         </p:nvSpPr>
         <p:spPr>
           <a:xfrm>
-            <a:off x="1005839" y="2743200"/>
-            <a:ext cx="2606040" cy="594360"/>
+            <a:off x="658368" y="2743200"/>
+            <a:ext cx="2331720" cy="685800"/>
           </a:xfrm>
           <a:prstGeom prst="rect">
             <a:avLst/>
@@ -6287,25 +6442,71 @@
             <a:r>
               <a:rPr sz="1400" b="0">
                 <a:solidFill>
-                  <a:srgbClr val="FFFFFF"/>
+                  <a:srgbClr val="222222"/>
                 </a:solidFill>
                 <a:latin typeface="Open Sans"/>
               </a:rPr>
-              <a:t>Séances, consignes, supports</a:t>
-            </a:r>
-          </a:p>
-        </p:txBody>
-      </p:sp>
-      <p:sp>
-        <p:nvSpPr>
-          <p:cNvPr id="6" name="Rounded Rectangle 5"/>
+              <a:t>Construire une activité</a:t>
+            </a:r>
+          </a:p>
+        </p:txBody>
+      </p:sp>
+      <p:sp>
+        <p:nvSpPr>
+          <p:cNvPr id="8" name="Rounded Rectangle 7"/>
           <p:cNvSpPr/>
           <p:nvPr/>
         </p:nvSpPr>
         <p:spPr>
           <a:xfrm>
-            <a:off x="4069080" y="1828800"/>
-            <a:ext cx="2880360" cy="2468880"/>
+            <a:off x="3383280" y="1965960"/>
+            <a:ext cx="2560320" cy="2057400"/>
+          </a:xfrm>
+          <a:prstGeom prst="roundRect">
+            <a:avLst/>
+          </a:prstGeom>
+          <a:solidFill>
+            <a:srgbClr val="FFFFFF"/>
+          </a:solidFill>
+          <a:ln>
+            <a:solidFill>
+              <a:srgbClr val="D9D9D9"/>
+            </a:solidFill>
+          </a:ln>
+        </p:spPr>
+        <p:style>
+          <a:lnRef idx="1">
+            <a:schemeClr val="accent1"/>
+          </a:lnRef>
+          <a:fillRef idx="3">
+            <a:schemeClr val="accent1"/>
+          </a:fillRef>
+          <a:effectRef idx="2">
+            <a:schemeClr val="accent1"/>
+          </a:effectRef>
+          <a:fontRef idx="minor">
+            <a:schemeClr val="lt1"/>
+          </a:fontRef>
+        </p:style>
+        <p:txBody>
+          <a:bodyPr rtlCol="0" anchor="ctr"/>
+          <a:lstStyle/>
+          <a:p>
+            <a:pPr algn="ctr"/>
+            <a:endParaRPr/>
+          </a:p>
+        </p:txBody>
+      </p:sp>
+      <p:sp>
+        <p:nvSpPr>
+          <p:cNvPr id="9" name="Rounded Rectangle 8"/>
+          <p:cNvSpPr/>
+          <p:nvPr/>
+        </p:nvSpPr>
+        <p:spPr>
+          <a:xfrm>
+            <a:off x="4297680" y="2057400"/>
+            <a:ext cx="594360" cy="594360"/>
           </a:xfrm>
           <a:prstGeom prst="roundRect">
             <a:avLst/>
@@ -6344,14 +6545,14 @@
       </p:sp>
       <p:sp>
         <p:nvSpPr>
-          <p:cNvPr id="7" name="TextBox 6"/>
+          <p:cNvPr id="10" name="TextBox 9"/>
           <p:cNvSpPr txBox="1"/>
           <p:nvPr/>
         </p:nvSpPr>
         <p:spPr>
           <a:xfrm>
-            <a:off x="4069080" y="2194560"/>
-            <a:ext cx="2880360" cy="411480"/>
+            <a:off x="4297680" y="2176272"/>
+            <a:ext cx="594360" cy="182880"/>
           </a:xfrm>
           <a:prstGeom prst="rect">
             <a:avLst/>
@@ -6366,27 +6567,27 @@
           <a:p>
             <a:pPr algn="ctr"/>
             <a:r>
-              <a:rPr sz="2200" b="1">
+              <a:rPr sz="1600" b="1">
                 <a:solidFill>
                   <a:srgbClr val="FFFFFF"/>
                 </a:solidFill>
                 <a:latin typeface="Open Sans"/>
               </a:rPr>
-              <a:t>Différencier</a:t>
-            </a:r>
-          </a:p>
-        </p:txBody>
-      </p:sp>
-      <p:sp>
-        <p:nvSpPr>
-          <p:cNvPr id="8" name="TextBox 7"/>
+              <a:t>2</a:t>
+            </a:r>
+          </a:p>
+        </p:txBody>
+      </p:sp>
+      <p:sp>
+        <p:nvSpPr>
+          <p:cNvPr id="11" name="TextBox 10"/>
           <p:cNvSpPr txBox="1"/>
           <p:nvPr/>
         </p:nvSpPr>
         <p:spPr>
           <a:xfrm>
-            <a:off x="4206240" y="2743200"/>
-            <a:ext cx="2606040" cy="594360"/>
+            <a:off x="3493008" y="2743200"/>
+            <a:ext cx="2331720" cy="685800"/>
           </a:xfrm>
           <a:prstGeom prst="rect">
             <a:avLst/>
@@ -6403,25 +6604,71 @@
             <a:r>
               <a:rPr sz="1400" b="0">
                 <a:solidFill>
-                  <a:srgbClr val="FFFFFF"/>
+                  <a:srgbClr val="222222"/>
                 </a:solidFill>
                 <a:latin typeface="Open Sans"/>
               </a:rPr>
-              <a:t>Aides, variantes, niveaux</a:t>
-            </a:r>
-          </a:p>
-        </p:txBody>
-      </p:sp>
-      <p:sp>
-        <p:nvSpPr>
-          <p:cNvPr id="9" name="Rounded Rectangle 8"/>
+              <a:t>La différencier</a:t>
+            </a:r>
+          </a:p>
+        </p:txBody>
+      </p:sp>
+      <p:sp>
+        <p:nvSpPr>
+          <p:cNvPr id="12" name="Rounded Rectangle 11"/>
           <p:cNvSpPr/>
           <p:nvPr/>
         </p:nvSpPr>
         <p:spPr>
           <a:xfrm>
-            <a:off x="7269480" y="1828800"/>
-            <a:ext cx="2880360" cy="2468880"/>
+            <a:off x="6217920" y="1965960"/>
+            <a:ext cx="2560320" cy="2057400"/>
+          </a:xfrm>
+          <a:prstGeom prst="roundRect">
+            <a:avLst/>
+          </a:prstGeom>
+          <a:solidFill>
+            <a:srgbClr val="FFFFFF"/>
+          </a:solidFill>
+          <a:ln>
+            <a:solidFill>
+              <a:srgbClr val="D9D9D9"/>
+            </a:solidFill>
+          </a:ln>
+        </p:spPr>
+        <p:style>
+          <a:lnRef idx="1">
+            <a:schemeClr val="accent1"/>
+          </a:lnRef>
+          <a:fillRef idx="3">
+            <a:schemeClr val="accent1"/>
+          </a:fillRef>
+          <a:effectRef idx="2">
+            <a:schemeClr val="accent1"/>
+          </a:effectRef>
+          <a:fontRef idx="minor">
+            <a:schemeClr val="lt1"/>
+          </a:fontRef>
+        </p:style>
+        <p:txBody>
+          <a:bodyPr rtlCol="0" anchor="ctr"/>
+          <a:lstStyle/>
+          <a:p>
+            <a:pPr algn="ctr"/>
+            <a:endParaRPr/>
+          </a:p>
+        </p:txBody>
+      </p:sp>
+      <p:sp>
+        <p:nvSpPr>
+          <p:cNvPr id="13" name="Rounded Rectangle 12"/>
+          <p:cNvSpPr/>
+          <p:nvPr/>
+        </p:nvSpPr>
+        <p:spPr>
+          <a:xfrm>
+            <a:off x="7132320" y="2057400"/>
+            <a:ext cx="594360" cy="594360"/>
           </a:xfrm>
           <a:prstGeom prst="roundRect">
             <a:avLst/>
@@ -6460,14 +6707,14 @@
       </p:sp>
       <p:sp>
         <p:nvSpPr>
-          <p:cNvPr id="10" name="TextBox 9"/>
+          <p:cNvPr id="14" name="TextBox 13"/>
           <p:cNvSpPr txBox="1"/>
           <p:nvPr/>
         </p:nvSpPr>
         <p:spPr>
           <a:xfrm>
-            <a:off x="7269480" y="2194560"/>
-            <a:ext cx="2880360" cy="411480"/>
+            <a:off x="7132320" y="2176272"/>
+            <a:ext cx="594360" cy="182880"/>
           </a:xfrm>
           <a:prstGeom prst="rect">
             <a:avLst/>
@@ -6482,27 +6729,27 @@
           <a:p>
             <a:pPr algn="ctr"/>
             <a:r>
-              <a:rPr sz="2200" b="1">
+              <a:rPr sz="1600" b="1">
                 <a:solidFill>
                   <a:srgbClr val="FFFFFF"/>
                 </a:solidFill>
                 <a:latin typeface="Open Sans"/>
               </a:rPr>
-              <a:t>Évaluer</a:t>
-            </a:r>
-          </a:p>
-        </p:txBody>
-      </p:sp>
-      <p:sp>
-        <p:nvSpPr>
-          <p:cNvPr id="11" name="TextBox 10"/>
+              <a:t>3</a:t>
+            </a:r>
+          </a:p>
+        </p:txBody>
+      </p:sp>
+      <p:sp>
+        <p:nvSpPr>
+          <p:cNvPr id="15" name="TextBox 14"/>
           <p:cNvSpPr txBox="1"/>
           <p:nvPr/>
         </p:nvSpPr>
         <p:spPr>
           <a:xfrm>
-            <a:off x="7406640" y="2743200"/>
-            <a:ext cx="2606040" cy="594360"/>
+            <a:off x="6327648" y="2743200"/>
+            <a:ext cx="2331720" cy="685800"/>
           </a:xfrm>
           <a:prstGeom prst="rect">
             <a:avLst/>
@@ -6519,18 +6766,180 @@
             <a:r>
               <a:rPr sz="1400" b="0">
                 <a:solidFill>
-                  <a:srgbClr val="FFFFFF"/>
+                  <a:srgbClr val="222222"/>
                 </a:solidFill>
                 <a:latin typeface="Open Sans"/>
               </a:rPr>
-              <a:t>Questions, corrigés, barèmes</a:t>
-            </a:r>
-          </a:p>
-        </p:txBody>
-      </p:sp>
-      <p:sp>
-        <p:nvSpPr>
-          <p:cNvPr id="12" name="Rectangle 11"/>
+              <a:t>Créer une évaluation</a:t>
+            </a:r>
+          </a:p>
+        </p:txBody>
+      </p:sp>
+      <p:sp>
+        <p:nvSpPr>
+          <p:cNvPr id="16" name="Rounded Rectangle 15"/>
+          <p:cNvSpPr/>
+          <p:nvPr/>
+        </p:nvSpPr>
+        <p:spPr>
+          <a:xfrm>
+            <a:off x="9052560" y="1965960"/>
+            <a:ext cx="2560320" cy="2057400"/>
+          </a:xfrm>
+          <a:prstGeom prst="roundRect">
+            <a:avLst/>
+          </a:prstGeom>
+          <a:solidFill>
+            <a:srgbClr val="FFFFFF"/>
+          </a:solidFill>
+          <a:ln>
+            <a:solidFill>
+              <a:srgbClr val="D9D9D9"/>
+            </a:solidFill>
+          </a:ln>
+        </p:spPr>
+        <p:style>
+          <a:lnRef idx="1">
+            <a:schemeClr val="accent1"/>
+          </a:lnRef>
+          <a:fillRef idx="3">
+            <a:schemeClr val="accent1"/>
+          </a:fillRef>
+          <a:effectRef idx="2">
+            <a:schemeClr val="accent1"/>
+          </a:effectRef>
+          <a:fontRef idx="minor">
+            <a:schemeClr val="lt1"/>
+          </a:fontRef>
+        </p:style>
+        <p:txBody>
+          <a:bodyPr rtlCol="0" anchor="ctr"/>
+          <a:lstStyle/>
+          <a:p>
+            <a:pPr algn="ctr"/>
+            <a:endParaRPr/>
+          </a:p>
+        </p:txBody>
+      </p:sp>
+      <p:sp>
+        <p:nvSpPr>
+          <p:cNvPr id="17" name="Rounded Rectangle 16"/>
+          <p:cNvSpPr/>
+          <p:nvPr/>
+        </p:nvSpPr>
+        <p:spPr>
+          <a:xfrm>
+            <a:off x="9966960" y="2057400"/>
+            <a:ext cx="594360" cy="594360"/>
+          </a:xfrm>
+          <a:prstGeom prst="roundRect">
+            <a:avLst/>
+          </a:prstGeom>
+          <a:solidFill>
+            <a:srgbClr val="F36C21"/>
+          </a:solidFill>
+          <a:ln>
+            <a:solidFill>
+              <a:srgbClr val="F36C21"/>
+            </a:solidFill>
+          </a:ln>
+        </p:spPr>
+        <p:style>
+          <a:lnRef idx="1">
+            <a:schemeClr val="accent1"/>
+          </a:lnRef>
+          <a:fillRef idx="3">
+            <a:schemeClr val="accent1"/>
+          </a:fillRef>
+          <a:effectRef idx="2">
+            <a:schemeClr val="accent1"/>
+          </a:effectRef>
+          <a:fontRef idx="minor">
+            <a:schemeClr val="lt1"/>
+          </a:fontRef>
+        </p:style>
+        <p:txBody>
+          <a:bodyPr rtlCol="0" anchor="ctr"/>
+          <a:lstStyle/>
+          <a:p>
+            <a:pPr algn="ctr"/>
+            <a:endParaRPr/>
+          </a:p>
+        </p:txBody>
+      </p:sp>
+      <p:sp>
+        <p:nvSpPr>
+          <p:cNvPr id="18" name="TextBox 17"/>
+          <p:cNvSpPr txBox="1"/>
+          <p:nvPr/>
+        </p:nvSpPr>
+        <p:spPr>
+          <a:xfrm>
+            <a:off x="9966960" y="2176272"/>
+            <a:ext cx="594360" cy="182880"/>
+          </a:xfrm>
+          <a:prstGeom prst="rect">
+            <a:avLst/>
+          </a:prstGeom>
+          <a:noFill/>
+        </p:spPr>
+        <p:txBody>
+          <a:bodyPr wrap="square" anchor="ctr">
+            <a:spAutoFit/>
+          </a:bodyPr>
+          <a:lstStyle/>
+          <a:p>
+            <a:pPr algn="ctr"/>
+            <a:r>
+              <a:rPr sz="1600" b="1">
+                <a:solidFill>
+                  <a:srgbClr val="FFFFFF"/>
+                </a:solidFill>
+                <a:latin typeface="Open Sans"/>
+              </a:rPr>
+              <a:t>4</a:t>
+            </a:r>
+          </a:p>
+        </p:txBody>
+      </p:sp>
+      <p:sp>
+        <p:nvSpPr>
+          <p:cNvPr id="19" name="TextBox 18"/>
+          <p:cNvSpPr txBox="1"/>
+          <p:nvPr/>
+        </p:nvSpPr>
+        <p:spPr>
+          <a:xfrm>
+            <a:off x="9162288" y="2743200"/>
+            <a:ext cx="2331720" cy="685800"/>
+          </a:xfrm>
+          <a:prstGeom prst="rect">
+            <a:avLst/>
+          </a:prstGeom>
+          <a:noFill/>
+        </p:spPr>
+        <p:txBody>
+          <a:bodyPr wrap="square" anchor="ctr">
+            <a:spAutoFit/>
+          </a:bodyPr>
+          <a:lstStyle/>
+          <a:p>
+            <a:pPr algn="ctr"/>
+            <a:r>
+              <a:rPr sz="1400" b="0">
+                <a:solidFill>
+                  <a:srgbClr val="222222"/>
+                </a:solidFill>
+                <a:latin typeface="Open Sans"/>
+              </a:rPr>
+              <a:t>Repartir avec une ressource prête à utiliser</a:t>
+            </a:r>
+          </a:p>
+        </p:txBody>
+      </p:sp>
+      <p:sp>
+        <p:nvSpPr>
+          <p:cNvPr id="20" name="Rectangle 19"/>
           <p:cNvSpPr/>
           <p:nvPr/>
         </p:nvSpPr>
@@ -6574,7 +6983,7 @@
       </p:sp>
       <p:sp>
         <p:nvSpPr>
-          <p:cNvPr id="13" name="TextBox 12"/>
+          <p:cNvPr id="21" name="TextBox 20"/>
           <p:cNvSpPr txBox="1"/>
           <p:nvPr/>
         </p:nvSpPr>
@@ -6608,6 +7017,36 @@
           </a:p>
         </p:txBody>
       </p:sp>
+      <p:pic>
+        <p:nvPicPr>
+          <p:cNvPr id="22" name="Image 21">
+            <a:extLst>
+              <a:ext uri="{FF2B5EF4-FFF2-40B4-BE49-F238E27FC236}">
+                <a16:creationId xmlns:a16="http://schemas.microsoft.com/office/drawing/2014/main" id="{4CF0CAD3-B55B-DAB3-46C5-506F4ED1153E}"/>
+              </a:ext>
+            </a:extLst>
+          </p:cNvPr>
+          <p:cNvPicPr>
+            <a:picLocks noChangeAspect="1"/>
+          </p:cNvPicPr>
+          <p:nvPr/>
+        </p:nvPicPr>
+        <p:blipFill>
+          <a:blip r:embed="rId2"/>
+          <a:stretch>
+            <a:fillRect/>
+          </a:stretch>
+        </p:blipFill>
+        <p:spPr>
+          <a:xfrm>
+            <a:off x="11124914" y="5976856"/>
+            <a:ext cx="1036891" cy="847888"/>
+          </a:xfrm>
+          <a:prstGeom prst="rect">
+            <a:avLst/>
+          </a:prstGeom>
+        </p:spPr>
+      </p:pic>
     </p:spTree>
   </p:cSld>
   <p:clrMapOvr>
@@ -6617,6 +7056,531 @@
 </file>
 
 <file path=ppt/slides/slide5.xml><?xml version="1.0" encoding="utf-8"?>
+<p:sld xmlns:a="http://schemas.openxmlformats.org/drawingml/2006/main" xmlns:r="http://schemas.openxmlformats.org/officeDocument/2006/relationships" xmlns:p="http://schemas.openxmlformats.org/presentationml/2006/main">
+  <p:cSld>
+    <p:bg>
+      <p:bgPr>
+        <a:solidFill>
+          <a:srgbClr val="F5F5F5"/>
+        </a:solidFill>
+        <a:effectLst/>
+      </p:bgPr>
+    </p:bg>
+    <p:spTree>
+      <p:nvGrpSpPr>
+        <p:cNvPr id="1" name=""/>
+        <p:cNvGrpSpPr/>
+        <p:nvPr/>
+      </p:nvGrpSpPr>
+      <p:grpSpPr>
+        <a:xfrm>
+          <a:off x="0" y="0"/>
+          <a:ext cx="0" cy="0"/>
+          <a:chOff x="0" y="0"/>
+          <a:chExt cx="0" cy="0"/>
+        </a:xfrm>
+      </p:grpSpPr>
+      <p:sp>
+        <p:nvSpPr>
+          <p:cNvPr id="2" name="TextBox 1"/>
+          <p:cNvSpPr txBox="1"/>
+          <p:nvPr/>
+        </p:nvSpPr>
+        <p:spPr>
+          <a:xfrm>
+            <a:off x="640080" y="320040"/>
+            <a:ext cx="10972800" cy="777240"/>
+          </a:xfrm>
+          <a:prstGeom prst="rect">
+            <a:avLst/>
+          </a:prstGeom>
+          <a:noFill/>
+        </p:spPr>
+        <p:txBody>
+          <a:bodyPr wrap="none">
+            <a:spAutoFit/>
+          </a:bodyPr>
+          <a:lstStyle/>
+          <a:p>
+            <a:r>
+              <a:rPr sz="2800" b="1">
+                <a:solidFill>
+                  <a:srgbClr val="004A7C"/>
+                </a:solidFill>
+                <a:latin typeface="Montserrat"/>
+              </a:rPr>
+              <a:t>Les 3 usages les plus rentables</a:t>
+            </a:r>
+          </a:p>
+        </p:txBody>
+      </p:sp>
+      <p:sp>
+        <p:nvSpPr>
+          <p:cNvPr id="3" name="Rounded Rectangle 2"/>
+          <p:cNvSpPr/>
+          <p:nvPr/>
+        </p:nvSpPr>
+        <p:spPr>
+          <a:xfrm>
+            <a:off x="868680" y="1828800"/>
+            <a:ext cx="2880360" cy="2468880"/>
+          </a:xfrm>
+          <a:prstGeom prst="roundRect">
+            <a:avLst/>
+          </a:prstGeom>
+          <a:solidFill>
+            <a:srgbClr val="F36C21"/>
+          </a:solidFill>
+          <a:ln>
+            <a:solidFill>
+              <a:srgbClr val="F36C21"/>
+            </a:solidFill>
+          </a:ln>
+        </p:spPr>
+        <p:style>
+          <a:lnRef idx="1">
+            <a:schemeClr val="accent1"/>
+          </a:lnRef>
+          <a:fillRef idx="3">
+            <a:schemeClr val="accent1"/>
+          </a:fillRef>
+          <a:effectRef idx="2">
+            <a:schemeClr val="accent1"/>
+          </a:effectRef>
+          <a:fontRef idx="minor">
+            <a:schemeClr val="lt1"/>
+          </a:fontRef>
+        </p:style>
+        <p:txBody>
+          <a:bodyPr rtlCol="0" anchor="ctr"/>
+          <a:lstStyle/>
+          <a:p>
+            <a:pPr algn="ctr"/>
+            <a:endParaRPr/>
+          </a:p>
+        </p:txBody>
+      </p:sp>
+      <p:sp>
+        <p:nvSpPr>
+          <p:cNvPr id="4" name="TextBox 3"/>
+          <p:cNvSpPr txBox="1"/>
+          <p:nvPr/>
+        </p:nvSpPr>
+        <p:spPr>
+          <a:xfrm>
+            <a:off x="868680" y="2194560"/>
+            <a:ext cx="2880360" cy="411480"/>
+          </a:xfrm>
+          <a:prstGeom prst="rect">
+            <a:avLst/>
+          </a:prstGeom>
+          <a:noFill/>
+        </p:spPr>
+        <p:txBody>
+          <a:bodyPr wrap="square" anchor="ctr">
+            <a:spAutoFit/>
+          </a:bodyPr>
+          <a:lstStyle/>
+          <a:p>
+            <a:pPr algn="ctr"/>
+            <a:r>
+              <a:rPr sz="2200" b="1">
+                <a:solidFill>
+                  <a:srgbClr val="FFFFFF"/>
+                </a:solidFill>
+                <a:latin typeface="Open Sans"/>
+              </a:rPr>
+              <a:t>Préparer</a:t>
+            </a:r>
+          </a:p>
+        </p:txBody>
+      </p:sp>
+      <p:sp>
+        <p:nvSpPr>
+          <p:cNvPr id="5" name="TextBox 4"/>
+          <p:cNvSpPr txBox="1"/>
+          <p:nvPr/>
+        </p:nvSpPr>
+        <p:spPr>
+          <a:xfrm>
+            <a:off x="1005839" y="2743200"/>
+            <a:ext cx="2606040" cy="594360"/>
+          </a:xfrm>
+          <a:prstGeom prst="rect">
+            <a:avLst/>
+          </a:prstGeom>
+          <a:noFill/>
+        </p:spPr>
+        <p:txBody>
+          <a:bodyPr wrap="square" anchor="ctr">
+            <a:spAutoFit/>
+          </a:bodyPr>
+          <a:lstStyle/>
+          <a:p>
+            <a:pPr algn="ctr"/>
+            <a:r>
+              <a:rPr sz="1400" b="0">
+                <a:solidFill>
+                  <a:srgbClr val="FFFFFF"/>
+                </a:solidFill>
+                <a:latin typeface="Open Sans"/>
+              </a:rPr>
+              <a:t>Séances, consignes, supports</a:t>
+            </a:r>
+          </a:p>
+        </p:txBody>
+      </p:sp>
+      <p:sp>
+        <p:nvSpPr>
+          <p:cNvPr id="6" name="Rounded Rectangle 5"/>
+          <p:cNvSpPr/>
+          <p:nvPr/>
+        </p:nvSpPr>
+        <p:spPr>
+          <a:xfrm>
+            <a:off x="4069080" y="1828800"/>
+            <a:ext cx="2880360" cy="2468880"/>
+          </a:xfrm>
+          <a:prstGeom prst="roundRect">
+            <a:avLst/>
+          </a:prstGeom>
+          <a:solidFill>
+            <a:srgbClr val="004A7C"/>
+          </a:solidFill>
+          <a:ln>
+            <a:solidFill>
+              <a:srgbClr val="004A7C"/>
+            </a:solidFill>
+          </a:ln>
+        </p:spPr>
+        <p:style>
+          <a:lnRef idx="1">
+            <a:schemeClr val="accent1"/>
+          </a:lnRef>
+          <a:fillRef idx="3">
+            <a:schemeClr val="accent1"/>
+          </a:fillRef>
+          <a:effectRef idx="2">
+            <a:schemeClr val="accent1"/>
+          </a:effectRef>
+          <a:fontRef idx="minor">
+            <a:schemeClr val="lt1"/>
+          </a:fontRef>
+        </p:style>
+        <p:txBody>
+          <a:bodyPr rtlCol="0" anchor="ctr"/>
+          <a:lstStyle/>
+          <a:p>
+            <a:pPr algn="ctr"/>
+            <a:endParaRPr/>
+          </a:p>
+        </p:txBody>
+      </p:sp>
+      <p:sp>
+        <p:nvSpPr>
+          <p:cNvPr id="7" name="TextBox 6"/>
+          <p:cNvSpPr txBox="1"/>
+          <p:nvPr/>
+        </p:nvSpPr>
+        <p:spPr>
+          <a:xfrm>
+            <a:off x="4069080" y="2194560"/>
+            <a:ext cx="2880360" cy="411480"/>
+          </a:xfrm>
+          <a:prstGeom prst="rect">
+            <a:avLst/>
+          </a:prstGeom>
+          <a:noFill/>
+        </p:spPr>
+        <p:txBody>
+          <a:bodyPr wrap="square" anchor="ctr">
+            <a:spAutoFit/>
+          </a:bodyPr>
+          <a:lstStyle/>
+          <a:p>
+            <a:pPr algn="ctr"/>
+            <a:r>
+              <a:rPr sz="2200" b="1">
+                <a:solidFill>
+                  <a:srgbClr val="FFFFFF"/>
+                </a:solidFill>
+                <a:latin typeface="Open Sans"/>
+              </a:rPr>
+              <a:t>Différencier</a:t>
+            </a:r>
+          </a:p>
+        </p:txBody>
+      </p:sp>
+      <p:sp>
+        <p:nvSpPr>
+          <p:cNvPr id="8" name="TextBox 7"/>
+          <p:cNvSpPr txBox="1"/>
+          <p:nvPr/>
+        </p:nvSpPr>
+        <p:spPr>
+          <a:xfrm>
+            <a:off x="4206240" y="2743200"/>
+            <a:ext cx="2606040" cy="594360"/>
+          </a:xfrm>
+          <a:prstGeom prst="rect">
+            <a:avLst/>
+          </a:prstGeom>
+          <a:noFill/>
+        </p:spPr>
+        <p:txBody>
+          <a:bodyPr wrap="square" anchor="ctr">
+            <a:spAutoFit/>
+          </a:bodyPr>
+          <a:lstStyle/>
+          <a:p>
+            <a:pPr algn="ctr"/>
+            <a:r>
+              <a:rPr sz="1400" b="0">
+                <a:solidFill>
+                  <a:srgbClr val="FFFFFF"/>
+                </a:solidFill>
+                <a:latin typeface="Open Sans"/>
+              </a:rPr>
+              <a:t>Aides, variantes, niveaux</a:t>
+            </a:r>
+          </a:p>
+        </p:txBody>
+      </p:sp>
+      <p:sp>
+        <p:nvSpPr>
+          <p:cNvPr id="9" name="Rounded Rectangle 8"/>
+          <p:cNvSpPr/>
+          <p:nvPr/>
+        </p:nvSpPr>
+        <p:spPr>
+          <a:xfrm>
+            <a:off x="7269480" y="1828800"/>
+            <a:ext cx="2880360" cy="2468880"/>
+          </a:xfrm>
+          <a:prstGeom prst="roundRect">
+            <a:avLst/>
+          </a:prstGeom>
+          <a:solidFill>
+            <a:srgbClr val="8F8F8F"/>
+          </a:solidFill>
+          <a:ln>
+            <a:solidFill>
+              <a:srgbClr val="8F8F8F"/>
+            </a:solidFill>
+          </a:ln>
+        </p:spPr>
+        <p:style>
+          <a:lnRef idx="1">
+            <a:schemeClr val="accent1"/>
+          </a:lnRef>
+          <a:fillRef idx="3">
+            <a:schemeClr val="accent1"/>
+          </a:fillRef>
+          <a:effectRef idx="2">
+            <a:schemeClr val="accent1"/>
+          </a:effectRef>
+          <a:fontRef idx="minor">
+            <a:schemeClr val="lt1"/>
+          </a:fontRef>
+        </p:style>
+        <p:txBody>
+          <a:bodyPr rtlCol="0" anchor="ctr"/>
+          <a:lstStyle/>
+          <a:p>
+            <a:pPr algn="ctr"/>
+            <a:endParaRPr/>
+          </a:p>
+        </p:txBody>
+      </p:sp>
+      <p:sp>
+        <p:nvSpPr>
+          <p:cNvPr id="10" name="TextBox 9"/>
+          <p:cNvSpPr txBox="1"/>
+          <p:nvPr/>
+        </p:nvSpPr>
+        <p:spPr>
+          <a:xfrm>
+            <a:off x="7269480" y="2194560"/>
+            <a:ext cx="2880360" cy="411480"/>
+          </a:xfrm>
+          <a:prstGeom prst="rect">
+            <a:avLst/>
+          </a:prstGeom>
+          <a:noFill/>
+        </p:spPr>
+        <p:txBody>
+          <a:bodyPr wrap="square" anchor="ctr">
+            <a:spAutoFit/>
+          </a:bodyPr>
+          <a:lstStyle/>
+          <a:p>
+            <a:pPr algn="ctr"/>
+            <a:r>
+              <a:rPr sz="2200" b="1">
+                <a:solidFill>
+                  <a:srgbClr val="FFFFFF"/>
+                </a:solidFill>
+                <a:latin typeface="Open Sans"/>
+              </a:rPr>
+              <a:t>Évaluer</a:t>
+            </a:r>
+          </a:p>
+        </p:txBody>
+      </p:sp>
+      <p:sp>
+        <p:nvSpPr>
+          <p:cNvPr id="11" name="TextBox 10"/>
+          <p:cNvSpPr txBox="1"/>
+          <p:nvPr/>
+        </p:nvSpPr>
+        <p:spPr>
+          <a:xfrm>
+            <a:off x="7406640" y="2743200"/>
+            <a:ext cx="2606040" cy="594360"/>
+          </a:xfrm>
+          <a:prstGeom prst="rect">
+            <a:avLst/>
+          </a:prstGeom>
+          <a:noFill/>
+        </p:spPr>
+        <p:txBody>
+          <a:bodyPr wrap="square" anchor="ctr">
+            <a:spAutoFit/>
+          </a:bodyPr>
+          <a:lstStyle/>
+          <a:p>
+            <a:pPr algn="ctr"/>
+            <a:r>
+              <a:rPr sz="1400" b="0">
+                <a:solidFill>
+                  <a:srgbClr val="FFFFFF"/>
+                </a:solidFill>
+                <a:latin typeface="Open Sans"/>
+              </a:rPr>
+              <a:t>Questions, corrigés, barèmes</a:t>
+            </a:r>
+          </a:p>
+        </p:txBody>
+      </p:sp>
+      <p:sp>
+        <p:nvSpPr>
+          <p:cNvPr id="12" name="Rectangle 11"/>
+          <p:cNvSpPr/>
+          <p:nvPr/>
+        </p:nvSpPr>
+        <p:spPr>
+          <a:xfrm>
+            <a:off x="502920" y="6382512"/>
+            <a:ext cx="11155680" cy="27432"/>
+          </a:xfrm>
+          <a:prstGeom prst="rect">
+            <a:avLst/>
+          </a:prstGeom>
+          <a:solidFill>
+            <a:srgbClr val="F36C21"/>
+          </a:solidFill>
+          <a:ln>
+            <a:noFill/>
+          </a:ln>
+        </p:spPr>
+        <p:style>
+          <a:lnRef idx="1">
+            <a:schemeClr val="accent1"/>
+          </a:lnRef>
+          <a:fillRef idx="3">
+            <a:schemeClr val="accent1"/>
+          </a:fillRef>
+          <a:effectRef idx="2">
+            <a:schemeClr val="accent1"/>
+          </a:effectRef>
+          <a:fontRef idx="minor">
+            <a:schemeClr val="lt1"/>
+          </a:fontRef>
+        </p:style>
+        <p:txBody>
+          <a:bodyPr rtlCol="0" anchor="ctr"/>
+          <a:lstStyle/>
+          <a:p>
+            <a:pPr algn="ctr"/>
+            <a:endParaRPr/>
+          </a:p>
+        </p:txBody>
+      </p:sp>
+      <p:sp>
+        <p:nvSpPr>
+          <p:cNvPr id="13" name="TextBox 12"/>
+          <p:cNvSpPr txBox="1"/>
+          <p:nvPr/>
+        </p:nvSpPr>
+        <p:spPr>
+          <a:xfrm>
+            <a:off x="548640" y="6400800"/>
+            <a:ext cx="2743200" cy="201168"/>
+          </a:xfrm>
+          <a:prstGeom prst="rect">
+            <a:avLst/>
+          </a:prstGeom>
+          <a:noFill/>
+        </p:spPr>
+        <p:txBody>
+          <a:bodyPr wrap="none">
+            <a:spAutoFit/>
+          </a:bodyPr>
+          <a:lstStyle/>
+          <a:p>
+            <a:pPr>
+              <a:defRPr sz="1100">
+                <a:solidFill>
+                  <a:srgbClr val="004A7C"/>
+                </a:solidFill>
+                <a:latin typeface="Open Sans"/>
+              </a:defRPr>
+            </a:pPr>
+            <a:r>
+              <a:t>atelier IA 2026</a:t>
+            </a:r>
+          </a:p>
+        </p:txBody>
+      </p:sp>
+      <p:pic>
+        <p:nvPicPr>
+          <p:cNvPr id="14" name="Image 13">
+            <a:extLst>
+              <a:ext uri="{FF2B5EF4-FFF2-40B4-BE49-F238E27FC236}">
+                <a16:creationId xmlns:a16="http://schemas.microsoft.com/office/drawing/2014/main" id="{C323813E-3867-E705-A9BB-2B716EE35388}"/>
+              </a:ext>
+            </a:extLst>
+          </p:cNvPr>
+          <p:cNvPicPr>
+            <a:picLocks noChangeAspect="1"/>
+          </p:cNvPicPr>
+          <p:nvPr/>
+        </p:nvPicPr>
+        <p:blipFill>
+          <a:blip r:embed="rId2"/>
+          <a:stretch>
+            <a:fillRect/>
+          </a:stretch>
+        </p:blipFill>
+        <p:spPr>
+          <a:xfrm>
+            <a:off x="11124914" y="5976856"/>
+            <a:ext cx="1036891" cy="847888"/>
+          </a:xfrm>
+          <a:prstGeom prst="rect">
+            <a:avLst/>
+          </a:prstGeom>
+        </p:spPr>
+      </p:pic>
+    </p:spTree>
+  </p:cSld>
+  <p:clrMapOvr>
+    <a:masterClrMapping/>
+  </p:clrMapOvr>
+</p:sld>
+</file>
+
+<file path=ppt/slides/slide6.xml><?xml version="1.0" encoding="utf-8"?>
 <p:sld xmlns:a="http://schemas.openxmlformats.org/drawingml/2006/main" xmlns:r="http://schemas.openxmlformats.org/officeDocument/2006/relationships" xmlns:p="http://schemas.openxmlformats.org/presentationml/2006/main">
   <p:cSld>
     <p:bg>
@@ -6887,779 +7851,6 @@
       <p:sp>
         <p:nvSpPr>
           <p:cNvPr id="9" name="TextBox 8"/>
-          <p:cNvSpPr txBox="1"/>
-          <p:nvPr/>
-        </p:nvSpPr>
-        <p:spPr>
-          <a:xfrm>
-            <a:off x="548640" y="6400800"/>
-            <a:ext cx="2743200" cy="201168"/>
-          </a:xfrm>
-          <a:prstGeom prst="rect">
-            <a:avLst/>
-          </a:prstGeom>
-          <a:noFill/>
-        </p:spPr>
-        <p:txBody>
-          <a:bodyPr wrap="none">
-            <a:spAutoFit/>
-          </a:bodyPr>
-          <a:lstStyle/>
-          <a:p>
-            <a:pPr>
-              <a:defRPr sz="1100">
-                <a:solidFill>
-                  <a:srgbClr val="004A7C"/>
-                </a:solidFill>
-                <a:latin typeface="Open Sans"/>
-              </a:defRPr>
-            </a:pPr>
-            <a:r>
-              <a:t>atelier IA 2026</a:t>
-            </a:r>
-          </a:p>
-        </p:txBody>
-      </p:sp>
-    </p:spTree>
-  </p:cSld>
-  <p:clrMapOvr>
-    <a:masterClrMapping/>
-  </p:clrMapOvr>
-</p:sld>
-</file>
-
-<file path=ppt/slides/slide6.xml><?xml version="1.0" encoding="utf-8"?>
-<p:sld xmlns:a="http://schemas.openxmlformats.org/drawingml/2006/main" xmlns:r="http://schemas.openxmlformats.org/officeDocument/2006/relationships" xmlns:p="http://schemas.openxmlformats.org/presentationml/2006/main">
-  <p:cSld>
-    <p:bg>
-      <p:bgPr>
-        <a:solidFill>
-          <a:srgbClr val="F5F5F5"/>
-        </a:solidFill>
-        <a:effectLst/>
-      </p:bgPr>
-    </p:bg>
-    <p:spTree>
-      <p:nvGrpSpPr>
-        <p:cNvPr id="1" name=""/>
-        <p:cNvGrpSpPr/>
-        <p:nvPr/>
-      </p:nvGrpSpPr>
-      <p:grpSpPr>
-        <a:xfrm>
-          <a:off x="0" y="0"/>
-          <a:ext cx="0" cy="0"/>
-          <a:chOff x="0" y="0"/>
-          <a:chExt cx="0" cy="0"/>
-        </a:xfrm>
-      </p:grpSpPr>
-      <p:sp>
-        <p:nvSpPr>
-          <p:cNvPr id="2" name="TextBox 1"/>
-          <p:cNvSpPr txBox="1"/>
-          <p:nvPr/>
-        </p:nvSpPr>
-        <p:spPr>
-          <a:xfrm>
-            <a:off x="640080" y="320040"/>
-            <a:ext cx="10972800" cy="777240"/>
-          </a:xfrm>
-          <a:prstGeom prst="rect">
-            <a:avLst/>
-          </a:prstGeom>
-          <a:noFill/>
-        </p:spPr>
-        <p:txBody>
-          <a:bodyPr wrap="none">
-            <a:spAutoFit/>
-          </a:bodyPr>
-          <a:lstStyle/>
-          <a:p>
-            <a:r>
-              <a:rPr sz="2800" b="1">
-                <a:solidFill>
-                  <a:srgbClr val="004A7C"/>
-                </a:solidFill>
-                <a:latin typeface="Montserrat"/>
-              </a:rPr>
-              <a:t>Démonstration WOW n°2</a:t>
-            </a:r>
-          </a:p>
-        </p:txBody>
-      </p:sp>
-      <p:sp>
-        <p:nvSpPr>
-          <p:cNvPr id="3" name="Rounded Rectangle 2"/>
-          <p:cNvSpPr/>
-          <p:nvPr/>
-        </p:nvSpPr>
-        <p:spPr>
-          <a:xfrm>
-            <a:off x="658368" y="1828800"/>
-            <a:ext cx="3611880" cy="2468880"/>
-          </a:xfrm>
-          <a:prstGeom prst="roundRect">
-            <a:avLst/>
-          </a:prstGeom>
-          <a:solidFill>
-            <a:srgbClr val="FFFFFF"/>
-          </a:solidFill>
-          <a:ln>
-            <a:solidFill>
-              <a:srgbClr val="D9D9D9"/>
-            </a:solidFill>
-          </a:ln>
-        </p:spPr>
-        <p:style>
-          <a:lnRef idx="1">
-            <a:schemeClr val="accent1"/>
-          </a:lnRef>
-          <a:fillRef idx="3">
-            <a:schemeClr val="accent1"/>
-          </a:fillRef>
-          <a:effectRef idx="2">
-            <a:schemeClr val="accent1"/>
-          </a:effectRef>
-          <a:fontRef idx="minor">
-            <a:schemeClr val="lt1"/>
-          </a:fontRef>
-        </p:style>
-        <p:txBody>
-          <a:bodyPr rtlCol="0" anchor="ctr"/>
-          <a:lstStyle/>
-          <a:p>
-            <a:pPr algn="ctr"/>
-            <a:endParaRPr/>
-          </a:p>
-        </p:txBody>
-      </p:sp>
-      <p:sp>
-        <p:nvSpPr>
-          <p:cNvPr id="4" name="Rounded Rectangle 3"/>
-          <p:cNvSpPr/>
-          <p:nvPr/>
-        </p:nvSpPr>
-        <p:spPr>
-          <a:xfrm>
-            <a:off x="658368" y="1828800"/>
-            <a:ext cx="3611880" cy="457200"/>
-          </a:xfrm>
-          <a:prstGeom prst="roundRect">
-            <a:avLst/>
-          </a:prstGeom>
-          <a:solidFill>
-            <a:srgbClr val="F36C21"/>
-          </a:solidFill>
-          <a:ln>
-            <a:solidFill>
-              <a:srgbClr val="F36C21"/>
-            </a:solidFill>
-          </a:ln>
-        </p:spPr>
-        <p:style>
-          <a:lnRef idx="1">
-            <a:schemeClr val="accent1"/>
-          </a:lnRef>
-          <a:fillRef idx="3">
-            <a:schemeClr val="accent1"/>
-          </a:fillRef>
-          <a:effectRef idx="2">
-            <a:schemeClr val="accent1"/>
-          </a:effectRef>
-          <a:fontRef idx="minor">
-            <a:schemeClr val="lt1"/>
-          </a:fontRef>
-        </p:style>
-        <p:txBody>
-          <a:bodyPr rtlCol="0" anchor="ctr"/>
-          <a:lstStyle/>
-          <a:p>
-            <a:pPr algn="ctr"/>
-            <a:endParaRPr/>
-          </a:p>
-        </p:txBody>
-      </p:sp>
-      <p:sp>
-        <p:nvSpPr>
-          <p:cNvPr id="5" name="TextBox 4"/>
-          <p:cNvSpPr txBox="1"/>
-          <p:nvPr/>
-        </p:nvSpPr>
-        <p:spPr>
-          <a:xfrm>
-            <a:off x="658368" y="1901952"/>
-            <a:ext cx="3611880" cy="201168"/>
-          </a:xfrm>
-          <a:prstGeom prst="rect">
-            <a:avLst/>
-          </a:prstGeom>
-          <a:noFill/>
-        </p:spPr>
-        <p:txBody>
-          <a:bodyPr wrap="square" anchor="ctr">
-            <a:spAutoFit/>
-          </a:bodyPr>
-          <a:lstStyle/>
-          <a:p>
-            <a:pPr algn="ctr"/>
-            <a:r>
-              <a:rPr sz="1600" b="1">
-                <a:solidFill>
-                  <a:srgbClr val="FFFFFF"/>
-                </a:solidFill>
-                <a:latin typeface="Open Sans"/>
-              </a:rPr>
-              <a:t>Élève fragile</a:t>
-            </a:r>
-          </a:p>
-        </p:txBody>
-      </p:sp>
-      <p:sp>
-        <p:nvSpPr>
-          <p:cNvPr id="6" name="TextBox 5"/>
-          <p:cNvSpPr txBox="1"/>
-          <p:nvPr/>
-        </p:nvSpPr>
-        <p:spPr>
-          <a:xfrm>
-            <a:off x="768096" y="2606040"/>
-            <a:ext cx="3383280" cy="457200"/>
-          </a:xfrm>
-          <a:prstGeom prst="rect">
-            <a:avLst/>
-          </a:prstGeom>
-          <a:noFill/>
-        </p:spPr>
-        <p:txBody>
-          <a:bodyPr wrap="square" anchor="ctr">
-            <a:spAutoFit/>
-          </a:bodyPr>
-          <a:lstStyle/>
-          <a:p>
-            <a:pPr algn="ctr"/>
-            <a:r>
-              <a:rPr sz="1700" b="1">
-                <a:solidFill>
-                  <a:srgbClr val="222222"/>
-                </a:solidFill>
-                <a:latin typeface="Open Sans"/>
-              </a:rPr>
-              <a:t>Aide renforcée</a:t>
-            </a:r>
-          </a:p>
-        </p:txBody>
-      </p:sp>
-      <p:sp>
-        <p:nvSpPr>
-          <p:cNvPr id="7" name="TextBox 6"/>
-          <p:cNvSpPr txBox="1"/>
-          <p:nvPr/>
-        </p:nvSpPr>
-        <p:spPr>
-          <a:xfrm>
-            <a:off x="768096" y="3154680"/>
-            <a:ext cx="3383280" cy="320040"/>
-          </a:xfrm>
-          <a:prstGeom prst="rect">
-            <a:avLst/>
-          </a:prstGeom>
-          <a:noFill/>
-        </p:spPr>
-        <p:txBody>
-          <a:bodyPr wrap="square" anchor="ctr">
-            <a:spAutoFit/>
-          </a:bodyPr>
-          <a:lstStyle/>
-          <a:p>
-            <a:pPr algn="ctr"/>
-            <a:r>
-              <a:rPr sz="1300" b="0">
-                <a:solidFill>
-                  <a:srgbClr val="222222"/>
-                </a:solidFill>
-                <a:latin typeface="Open Sans"/>
-              </a:rPr>
-              <a:t>Adapter sans changer l’objectif</a:t>
-            </a:r>
-          </a:p>
-        </p:txBody>
-      </p:sp>
-      <p:sp>
-        <p:nvSpPr>
-          <p:cNvPr id="8" name="Rounded Rectangle 7"/>
-          <p:cNvSpPr/>
-          <p:nvPr/>
-        </p:nvSpPr>
-        <p:spPr>
-          <a:xfrm>
-            <a:off x="4480559" y="1828800"/>
-            <a:ext cx="3611880" cy="2468880"/>
-          </a:xfrm>
-          <a:prstGeom prst="roundRect">
-            <a:avLst/>
-          </a:prstGeom>
-          <a:solidFill>
-            <a:srgbClr val="FFFFFF"/>
-          </a:solidFill>
-          <a:ln>
-            <a:solidFill>
-              <a:srgbClr val="D9D9D9"/>
-            </a:solidFill>
-          </a:ln>
-        </p:spPr>
-        <p:style>
-          <a:lnRef idx="1">
-            <a:schemeClr val="accent1"/>
-          </a:lnRef>
-          <a:fillRef idx="3">
-            <a:schemeClr val="accent1"/>
-          </a:fillRef>
-          <a:effectRef idx="2">
-            <a:schemeClr val="accent1"/>
-          </a:effectRef>
-          <a:fontRef idx="minor">
-            <a:schemeClr val="lt1"/>
-          </a:fontRef>
-        </p:style>
-        <p:txBody>
-          <a:bodyPr rtlCol="0" anchor="ctr"/>
-          <a:lstStyle/>
-          <a:p>
-            <a:pPr algn="ctr"/>
-            <a:endParaRPr/>
-          </a:p>
-        </p:txBody>
-      </p:sp>
-      <p:sp>
-        <p:nvSpPr>
-          <p:cNvPr id="9" name="Rounded Rectangle 8"/>
-          <p:cNvSpPr/>
-          <p:nvPr/>
-        </p:nvSpPr>
-        <p:spPr>
-          <a:xfrm>
-            <a:off x="4480559" y="1828800"/>
-            <a:ext cx="3611880" cy="457200"/>
-          </a:xfrm>
-          <a:prstGeom prst="roundRect">
-            <a:avLst/>
-          </a:prstGeom>
-          <a:solidFill>
-            <a:srgbClr val="004A7C"/>
-          </a:solidFill>
-          <a:ln>
-            <a:solidFill>
-              <a:srgbClr val="004A7C"/>
-            </a:solidFill>
-          </a:ln>
-        </p:spPr>
-        <p:style>
-          <a:lnRef idx="1">
-            <a:schemeClr val="accent1"/>
-          </a:lnRef>
-          <a:fillRef idx="3">
-            <a:schemeClr val="accent1"/>
-          </a:fillRef>
-          <a:effectRef idx="2">
-            <a:schemeClr val="accent1"/>
-          </a:effectRef>
-          <a:fontRef idx="minor">
-            <a:schemeClr val="lt1"/>
-          </a:fontRef>
-        </p:style>
-        <p:txBody>
-          <a:bodyPr rtlCol="0" anchor="ctr"/>
-          <a:lstStyle/>
-          <a:p>
-            <a:pPr algn="ctr"/>
-            <a:endParaRPr/>
-          </a:p>
-        </p:txBody>
-      </p:sp>
-      <p:sp>
-        <p:nvSpPr>
-          <p:cNvPr id="10" name="TextBox 9"/>
-          <p:cNvSpPr txBox="1"/>
-          <p:nvPr/>
-        </p:nvSpPr>
-        <p:spPr>
-          <a:xfrm>
-            <a:off x="4480559" y="1901952"/>
-            <a:ext cx="3611880" cy="201168"/>
-          </a:xfrm>
-          <a:prstGeom prst="rect">
-            <a:avLst/>
-          </a:prstGeom>
-          <a:noFill/>
-        </p:spPr>
-        <p:txBody>
-          <a:bodyPr wrap="square" anchor="ctr">
-            <a:spAutoFit/>
-          </a:bodyPr>
-          <a:lstStyle/>
-          <a:p>
-            <a:pPr algn="ctr"/>
-            <a:r>
-              <a:rPr sz="1600" b="1">
-                <a:solidFill>
-                  <a:srgbClr val="FFFFFF"/>
-                </a:solidFill>
-                <a:latin typeface="Open Sans"/>
-              </a:rPr>
-              <a:t>Élève standard</a:t>
-            </a:r>
-          </a:p>
-        </p:txBody>
-      </p:sp>
-      <p:sp>
-        <p:nvSpPr>
-          <p:cNvPr id="11" name="TextBox 10"/>
-          <p:cNvSpPr txBox="1"/>
-          <p:nvPr/>
-        </p:nvSpPr>
-        <p:spPr>
-          <a:xfrm>
-            <a:off x="4590288" y="2606040"/>
-            <a:ext cx="3383280" cy="457200"/>
-          </a:xfrm>
-          <a:prstGeom prst="rect">
-            <a:avLst/>
-          </a:prstGeom>
-          <a:noFill/>
-        </p:spPr>
-        <p:txBody>
-          <a:bodyPr wrap="square" anchor="ctr">
-            <a:spAutoFit/>
-          </a:bodyPr>
-          <a:lstStyle/>
-          <a:p>
-            <a:pPr algn="ctr"/>
-            <a:r>
-              <a:rPr sz="1700" b="1">
-                <a:solidFill>
-                  <a:srgbClr val="222222"/>
-                </a:solidFill>
-                <a:latin typeface="Open Sans"/>
-              </a:rPr>
-              <a:t>Chemin classique</a:t>
-            </a:r>
-          </a:p>
-        </p:txBody>
-      </p:sp>
-      <p:sp>
-        <p:nvSpPr>
-          <p:cNvPr id="12" name="TextBox 11"/>
-          <p:cNvSpPr txBox="1"/>
-          <p:nvPr/>
-        </p:nvSpPr>
-        <p:spPr>
-          <a:xfrm>
-            <a:off x="4590288" y="3154680"/>
-            <a:ext cx="3383280" cy="320040"/>
-          </a:xfrm>
-          <a:prstGeom prst="rect">
-            <a:avLst/>
-          </a:prstGeom>
-          <a:noFill/>
-        </p:spPr>
-        <p:txBody>
-          <a:bodyPr wrap="square" anchor="ctr">
-            <a:spAutoFit/>
-          </a:bodyPr>
-          <a:lstStyle/>
-          <a:p>
-            <a:pPr algn="ctr"/>
-            <a:r>
-              <a:rPr sz="1300" b="0">
-                <a:solidFill>
-                  <a:srgbClr val="222222"/>
-                </a:solidFill>
-                <a:latin typeface="Open Sans"/>
-              </a:rPr>
-              <a:t>Adapter sans changer l’objectif</a:t>
-            </a:r>
-          </a:p>
-        </p:txBody>
-      </p:sp>
-      <p:sp>
-        <p:nvSpPr>
-          <p:cNvPr id="13" name="Rounded Rectangle 12"/>
-          <p:cNvSpPr/>
-          <p:nvPr/>
-        </p:nvSpPr>
-        <p:spPr>
-          <a:xfrm>
-            <a:off x="8302752" y="1828800"/>
-            <a:ext cx="3611880" cy="2468880"/>
-          </a:xfrm>
-          <a:prstGeom prst="roundRect">
-            <a:avLst/>
-          </a:prstGeom>
-          <a:solidFill>
-            <a:srgbClr val="FFFFFF"/>
-          </a:solidFill>
-          <a:ln>
-            <a:solidFill>
-              <a:srgbClr val="D9D9D9"/>
-            </a:solidFill>
-          </a:ln>
-        </p:spPr>
-        <p:style>
-          <a:lnRef idx="1">
-            <a:schemeClr val="accent1"/>
-          </a:lnRef>
-          <a:fillRef idx="3">
-            <a:schemeClr val="accent1"/>
-          </a:fillRef>
-          <a:effectRef idx="2">
-            <a:schemeClr val="accent1"/>
-          </a:effectRef>
-          <a:fontRef idx="minor">
-            <a:schemeClr val="lt1"/>
-          </a:fontRef>
-        </p:style>
-        <p:txBody>
-          <a:bodyPr rtlCol="0" anchor="ctr"/>
-          <a:lstStyle/>
-          <a:p>
-            <a:pPr algn="ctr"/>
-            <a:endParaRPr/>
-          </a:p>
-        </p:txBody>
-      </p:sp>
-      <p:sp>
-        <p:nvSpPr>
-          <p:cNvPr id="14" name="Rounded Rectangle 13"/>
-          <p:cNvSpPr/>
-          <p:nvPr/>
-        </p:nvSpPr>
-        <p:spPr>
-          <a:xfrm>
-            <a:off x="8302752" y="1828800"/>
-            <a:ext cx="3611880" cy="457200"/>
-          </a:xfrm>
-          <a:prstGeom prst="roundRect">
-            <a:avLst/>
-          </a:prstGeom>
-          <a:solidFill>
-            <a:srgbClr val="8F8F8F"/>
-          </a:solidFill>
-          <a:ln>
-            <a:solidFill>
-              <a:srgbClr val="8F8F8F"/>
-            </a:solidFill>
-          </a:ln>
-        </p:spPr>
-        <p:style>
-          <a:lnRef idx="1">
-            <a:schemeClr val="accent1"/>
-          </a:lnRef>
-          <a:fillRef idx="3">
-            <a:schemeClr val="accent1"/>
-          </a:fillRef>
-          <a:effectRef idx="2">
-            <a:schemeClr val="accent1"/>
-          </a:effectRef>
-          <a:fontRef idx="minor">
-            <a:schemeClr val="lt1"/>
-          </a:fontRef>
-        </p:style>
-        <p:txBody>
-          <a:bodyPr rtlCol="0" anchor="ctr"/>
-          <a:lstStyle/>
-          <a:p>
-            <a:pPr algn="ctr"/>
-            <a:endParaRPr/>
-          </a:p>
-        </p:txBody>
-      </p:sp>
-      <p:sp>
-        <p:nvSpPr>
-          <p:cNvPr id="15" name="TextBox 14"/>
-          <p:cNvSpPr txBox="1"/>
-          <p:nvPr/>
-        </p:nvSpPr>
-        <p:spPr>
-          <a:xfrm>
-            <a:off x="8302752" y="1901952"/>
-            <a:ext cx="3611880" cy="201168"/>
-          </a:xfrm>
-          <a:prstGeom prst="rect">
-            <a:avLst/>
-          </a:prstGeom>
-          <a:noFill/>
-        </p:spPr>
-        <p:txBody>
-          <a:bodyPr wrap="square" anchor="ctr">
-            <a:spAutoFit/>
-          </a:bodyPr>
-          <a:lstStyle/>
-          <a:p>
-            <a:pPr algn="ctr"/>
-            <a:r>
-              <a:rPr sz="1600" b="1">
-                <a:solidFill>
-                  <a:srgbClr val="FFFFFF"/>
-                </a:solidFill>
-                <a:latin typeface="Open Sans"/>
-              </a:rPr>
-              <a:t>Élève avancé</a:t>
-            </a:r>
-          </a:p>
-        </p:txBody>
-      </p:sp>
-      <p:sp>
-        <p:nvSpPr>
-          <p:cNvPr id="16" name="TextBox 15"/>
-          <p:cNvSpPr txBox="1"/>
-          <p:nvPr/>
-        </p:nvSpPr>
-        <p:spPr>
-          <a:xfrm>
-            <a:off x="8412480" y="2606040"/>
-            <a:ext cx="3383280" cy="457200"/>
-          </a:xfrm>
-          <a:prstGeom prst="rect">
-            <a:avLst/>
-          </a:prstGeom>
-          <a:noFill/>
-        </p:spPr>
-        <p:txBody>
-          <a:bodyPr wrap="square" anchor="ctr">
-            <a:spAutoFit/>
-          </a:bodyPr>
-          <a:lstStyle/>
-          <a:p>
-            <a:pPr algn="ctr"/>
-            <a:r>
-              <a:rPr sz="1700" b="1">
-                <a:solidFill>
-                  <a:srgbClr val="222222"/>
-                </a:solidFill>
-                <a:latin typeface="Open Sans"/>
-              </a:rPr>
-              <a:t>Défi supplémentaire</a:t>
-            </a:r>
-          </a:p>
-        </p:txBody>
-      </p:sp>
-      <p:sp>
-        <p:nvSpPr>
-          <p:cNvPr id="17" name="TextBox 16"/>
-          <p:cNvSpPr txBox="1"/>
-          <p:nvPr/>
-        </p:nvSpPr>
-        <p:spPr>
-          <a:xfrm>
-            <a:off x="8412480" y="3154680"/>
-            <a:ext cx="3383280" cy="320040"/>
-          </a:xfrm>
-          <a:prstGeom prst="rect">
-            <a:avLst/>
-          </a:prstGeom>
-          <a:noFill/>
-        </p:spPr>
-        <p:txBody>
-          <a:bodyPr wrap="square" anchor="ctr">
-            <a:spAutoFit/>
-          </a:bodyPr>
-          <a:lstStyle/>
-          <a:p>
-            <a:pPr algn="ctr"/>
-            <a:r>
-              <a:rPr sz="1300" b="0">
-                <a:solidFill>
-                  <a:srgbClr val="222222"/>
-                </a:solidFill>
-                <a:latin typeface="Open Sans"/>
-              </a:rPr>
-              <a:t>Adapter sans changer l’objectif</a:t>
-            </a:r>
-          </a:p>
-        </p:txBody>
-      </p:sp>
-      <p:sp>
-        <p:nvSpPr>
-          <p:cNvPr id="18" name="TextBox 17"/>
-          <p:cNvSpPr txBox="1"/>
-          <p:nvPr/>
-        </p:nvSpPr>
-        <p:spPr>
-          <a:xfrm>
-            <a:off x="914400" y="4663440"/>
-            <a:ext cx="10424160" cy="502920"/>
-          </a:xfrm>
-          <a:prstGeom prst="rect">
-            <a:avLst/>
-          </a:prstGeom>
-          <a:noFill/>
-        </p:spPr>
-        <p:txBody>
-          <a:bodyPr wrap="square" anchor="ctr">
-            <a:spAutoFit/>
-          </a:bodyPr>
-          <a:lstStyle/>
-          <a:p>
-            <a:pPr algn="ctr"/>
-            <a:r>
-              <a:rPr sz="1800" b="0">
-                <a:solidFill>
-                  <a:srgbClr val="222222"/>
-                </a:solidFill>
-                <a:latin typeface="Open Sans"/>
-              </a:rPr>
-              <a:t>Reprends cette séance et adapte-la aux trois niveaux. Conserve le même objectif.</a:t>
-            </a:r>
-          </a:p>
-        </p:txBody>
-      </p:sp>
-      <p:sp>
-        <p:nvSpPr>
-          <p:cNvPr id="19" name="Rectangle 18"/>
-          <p:cNvSpPr/>
-          <p:nvPr/>
-        </p:nvSpPr>
-        <p:spPr>
-          <a:xfrm>
-            <a:off x="502920" y="6382512"/>
-            <a:ext cx="11155680" cy="27432"/>
-          </a:xfrm>
-          <a:prstGeom prst="rect">
-            <a:avLst/>
-          </a:prstGeom>
-          <a:solidFill>
-            <a:srgbClr val="F36C21"/>
-          </a:solidFill>
-          <a:ln>
-            <a:noFill/>
-          </a:ln>
-        </p:spPr>
-        <p:style>
-          <a:lnRef idx="1">
-            <a:schemeClr val="accent1"/>
-          </a:lnRef>
-          <a:fillRef idx="3">
-            <a:schemeClr val="accent1"/>
-          </a:fillRef>
-          <a:effectRef idx="2">
-            <a:schemeClr val="accent1"/>
-          </a:effectRef>
-          <a:fontRef idx="minor">
-            <a:schemeClr val="lt1"/>
-          </a:fontRef>
-        </p:style>
-        <p:txBody>
-          <a:bodyPr rtlCol="0" anchor="ctr"/>
-          <a:lstStyle/>
-          <a:p>
-            <a:pPr algn="ctr"/>
-            <a:endParaRPr/>
-          </a:p>
-        </p:txBody>
-      </p:sp>
-      <p:sp>
-        <p:nvSpPr>
-          <p:cNvPr id="20" name="TextBox 19"/>
           <p:cNvSpPr txBox="1"/>
           <p:nvPr/>
         </p:nvSpPr>
@@ -7755,7 +7946,7 @@
                 </a:solidFill>
                 <a:latin typeface="Montserrat"/>
               </a:rPr>
-              <a:t>Démonstration WOW n°3</a:t>
+              <a:t>Démonstration WOW n°2</a:t>
             </a:r>
           </a:p>
         </p:txBody>
@@ -7768,8 +7959,8 @@
         </p:nvSpPr>
         <p:spPr>
           <a:xfrm>
-            <a:off x="868680" y="1783080"/>
-            <a:ext cx="3840480" cy="2697480"/>
+            <a:off x="658368" y="1828800"/>
+            <a:ext cx="3611880" cy="2468880"/>
           </a:xfrm>
           <a:prstGeom prst="roundRect">
             <a:avLst/>
@@ -7808,94 +7999,24 @@
       </p:sp>
       <p:sp>
         <p:nvSpPr>
-          <p:cNvPr id="4" name="TextBox 3"/>
-          <p:cNvSpPr txBox="1"/>
-          <p:nvPr/>
-        </p:nvSpPr>
-        <p:spPr>
-          <a:xfrm>
-            <a:off x="868680" y="2148840"/>
-            <a:ext cx="3840480" cy="411480"/>
-          </a:xfrm>
-          <a:prstGeom prst="rect">
-            <a:avLst/>
-          </a:prstGeom>
-          <a:noFill/>
-        </p:spPr>
-        <p:txBody>
-          <a:bodyPr wrap="square" anchor="ctr">
-            <a:spAutoFit/>
-          </a:bodyPr>
-          <a:lstStyle/>
-          <a:p>
-            <a:pPr algn="ctr"/>
-            <a:r>
-              <a:rPr sz="3400" b="0">
-                <a:solidFill>
-                  <a:srgbClr val="F36C21"/>
-                </a:solidFill>
-                <a:latin typeface="Open Sans"/>
-              </a:rPr>
-              <a:t>📝</a:t>
-            </a:r>
-          </a:p>
-        </p:txBody>
-      </p:sp>
-      <p:sp>
-        <p:nvSpPr>
-          <p:cNvPr id="5" name="TextBox 4"/>
-          <p:cNvSpPr txBox="1"/>
-          <p:nvPr/>
-        </p:nvSpPr>
-        <p:spPr>
-          <a:xfrm>
-            <a:off x="914400" y="2697480"/>
-            <a:ext cx="3749039" cy="502920"/>
-          </a:xfrm>
-          <a:prstGeom prst="rect">
-            <a:avLst/>
-          </a:prstGeom>
-          <a:noFill/>
-        </p:spPr>
-        <p:txBody>
-          <a:bodyPr wrap="square" anchor="ctr">
-            <a:spAutoFit/>
-          </a:bodyPr>
-          <a:lstStyle/>
-          <a:p>
-            <a:pPr algn="ctr"/>
-            <a:r>
-              <a:rPr sz="1800" b="1">
-                <a:solidFill>
-                  <a:srgbClr val="222222"/>
-                </a:solidFill>
-                <a:latin typeface="Open Sans"/>
-              </a:rPr>
-              <a:t>Créer une évaluation de 15 minutes</a:t>
-            </a:r>
-          </a:p>
-        </p:txBody>
-      </p:sp>
-      <p:sp>
-        <p:nvSpPr>
-          <p:cNvPr id="6" name="Rounded Rectangle 5"/>
+          <p:cNvPr id="4" name="Rounded Rectangle 3"/>
           <p:cNvSpPr/>
           <p:nvPr/>
         </p:nvSpPr>
         <p:spPr>
           <a:xfrm>
-            <a:off x="4892040" y="1783080"/>
-            <a:ext cx="6355080" cy="2697480"/>
+            <a:off x="658368" y="1828800"/>
+            <a:ext cx="3611880" cy="457200"/>
           </a:xfrm>
           <a:prstGeom prst="roundRect">
             <a:avLst/>
           </a:prstGeom>
           <a:solidFill>
-            <a:srgbClr val="ECECEC"/>
+            <a:srgbClr val="F36C21"/>
           </a:solidFill>
           <a:ln>
             <a:solidFill>
-              <a:srgbClr val="ECECEC"/>
+              <a:srgbClr val="F36C21"/>
             </a:solidFill>
           </a:ln>
         </p:spPr>
@@ -7924,14 +8045,14 @@
       </p:sp>
       <p:sp>
         <p:nvSpPr>
-          <p:cNvPr id="7" name="TextBox 6"/>
+          <p:cNvPr id="5" name="TextBox 4"/>
           <p:cNvSpPr txBox="1"/>
           <p:nvPr/>
         </p:nvSpPr>
         <p:spPr>
           <a:xfrm>
-            <a:off x="5212080" y="2286000"/>
-            <a:ext cx="5760720" cy="411480"/>
+            <a:off x="658368" y="1901952"/>
+            <a:ext cx="3611880" cy="201168"/>
           </a:xfrm>
           <a:prstGeom prst="rect">
             <a:avLst/>
@@ -7946,27 +8067,27 @@
           <a:p>
             <a:pPr algn="ctr"/>
             <a:r>
-              <a:rPr sz="2200" b="1">
-                <a:solidFill>
-                  <a:srgbClr val="004A7C"/>
+              <a:rPr sz="1600" b="1">
+                <a:solidFill>
+                  <a:srgbClr val="FFFFFF"/>
                 </a:solidFill>
                 <a:latin typeface="Open Sans"/>
               </a:rPr>
-              <a:t>Sujet</a:t>
-            </a:r>
-          </a:p>
-        </p:txBody>
-      </p:sp>
-      <p:sp>
-        <p:nvSpPr>
-          <p:cNvPr id="8" name="TextBox 7"/>
+              <a:t>Élève fragile</a:t>
+            </a:r>
+          </a:p>
+        </p:txBody>
+      </p:sp>
+      <p:sp>
+        <p:nvSpPr>
+          <p:cNvPr id="6" name="TextBox 5"/>
           <p:cNvSpPr txBox="1"/>
           <p:nvPr/>
         </p:nvSpPr>
         <p:spPr>
           <a:xfrm>
-            <a:off x="5212080" y="2788920"/>
-            <a:ext cx="5760720" cy="411480"/>
+            <a:off x="768096" y="2606040"/>
+            <a:ext cx="3383280" cy="457200"/>
           </a:xfrm>
           <a:prstGeom prst="rect">
             <a:avLst/>
@@ -7981,27 +8102,27 @@
           <a:p>
             <a:pPr algn="ctr"/>
             <a:r>
-              <a:rPr sz="2200" b="1">
-                <a:solidFill>
-                  <a:srgbClr val="004A7C"/>
+              <a:rPr sz="1700" b="1">
+                <a:solidFill>
+                  <a:srgbClr val="222222"/>
                 </a:solidFill>
                 <a:latin typeface="Open Sans"/>
               </a:rPr>
-              <a:t>Corrigé</a:t>
-            </a:r>
-          </a:p>
-        </p:txBody>
-      </p:sp>
-      <p:sp>
-        <p:nvSpPr>
-          <p:cNvPr id="9" name="TextBox 8"/>
+              <a:t>Aide renforcée</a:t>
+            </a:r>
+          </a:p>
+        </p:txBody>
+      </p:sp>
+      <p:sp>
+        <p:nvSpPr>
+          <p:cNvPr id="7" name="TextBox 6"/>
           <p:cNvSpPr txBox="1"/>
           <p:nvPr/>
         </p:nvSpPr>
         <p:spPr>
           <a:xfrm>
-            <a:off x="5212080" y="3291840"/>
-            <a:ext cx="5760720" cy="411480"/>
+            <a:off x="768096" y="3154680"/>
+            <a:ext cx="3383280" cy="320040"/>
           </a:xfrm>
           <a:prstGeom prst="rect">
             <a:avLst/>
@@ -8016,20 +8137,449 @@
           <a:p>
             <a:pPr algn="ctr"/>
             <a:r>
-              <a:rPr sz="2200" b="1">
-                <a:solidFill>
-                  <a:srgbClr val="004A7C"/>
+              <a:rPr sz="1300" b="0">
+                <a:solidFill>
+                  <a:srgbClr val="222222"/>
                 </a:solidFill>
                 <a:latin typeface="Open Sans"/>
               </a:rPr>
-              <a:t>Barème</a:t>
-            </a:r>
-          </a:p>
-        </p:txBody>
-      </p:sp>
-      <p:sp>
-        <p:nvSpPr>
-          <p:cNvPr id="10" name="Rectangle 9"/>
+              <a:t>Adapter sans changer l’objectif</a:t>
+            </a:r>
+          </a:p>
+        </p:txBody>
+      </p:sp>
+      <p:sp>
+        <p:nvSpPr>
+          <p:cNvPr id="8" name="Rounded Rectangle 7"/>
+          <p:cNvSpPr/>
+          <p:nvPr/>
+        </p:nvSpPr>
+        <p:spPr>
+          <a:xfrm>
+            <a:off x="4480559" y="1828800"/>
+            <a:ext cx="3611880" cy="2468880"/>
+          </a:xfrm>
+          <a:prstGeom prst="roundRect">
+            <a:avLst/>
+          </a:prstGeom>
+          <a:solidFill>
+            <a:srgbClr val="FFFFFF"/>
+          </a:solidFill>
+          <a:ln>
+            <a:solidFill>
+              <a:srgbClr val="D9D9D9"/>
+            </a:solidFill>
+          </a:ln>
+        </p:spPr>
+        <p:style>
+          <a:lnRef idx="1">
+            <a:schemeClr val="accent1"/>
+          </a:lnRef>
+          <a:fillRef idx="3">
+            <a:schemeClr val="accent1"/>
+          </a:fillRef>
+          <a:effectRef idx="2">
+            <a:schemeClr val="accent1"/>
+          </a:effectRef>
+          <a:fontRef idx="minor">
+            <a:schemeClr val="lt1"/>
+          </a:fontRef>
+        </p:style>
+        <p:txBody>
+          <a:bodyPr rtlCol="0" anchor="ctr"/>
+          <a:lstStyle/>
+          <a:p>
+            <a:pPr algn="ctr"/>
+            <a:endParaRPr/>
+          </a:p>
+        </p:txBody>
+      </p:sp>
+      <p:sp>
+        <p:nvSpPr>
+          <p:cNvPr id="9" name="Rounded Rectangle 8"/>
+          <p:cNvSpPr/>
+          <p:nvPr/>
+        </p:nvSpPr>
+        <p:spPr>
+          <a:xfrm>
+            <a:off x="4480559" y="1828800"/>
+            <a:ext cx="3611880" cy="457200"/>
+          </a:xfrm>
+          <a:prstGeom prst="roundRect">
+            <a:avLst/>
+          </a:prstGeom>
+          <a:solidFill>
+            <a:srgbClr val="004A7C"/>
+          </a:solidFill>
+          <a:ln>
+            <a:solidFill>
+              <a:srgbClr val="004A7C"/>
+            </a:solidFill>
+          </a:ln>
+        </p:spPr>
+        <p:style>
+          <a:lnRef idx="1">
+            <a:schemeClr val="accent1"/>
+          </a:lnRef>
+          <a:fillRef idx="3">
+            <a:schemeClr val="accent1"/>
+          </a:fillRef>
+          <a:effectRef idx="2">
+            <a:schemeClr val="accent1"/>
+          </a:effectRef>
+          <a:fontRef idx="minor">
+            <a:schemeClr val="lt1"/>
+          </a:fontRef>
+        </p:style>
+        <p:txBody>
+          <a:bodyPr rtlCol="0" anchor="ctr"/>
+          <a:lstStyle/>
+          <a:p>
+            <a:pPr algn="ctr"/>
+            <a:endParaRPr/>
+          </a:p>
+        </p:txBody>
+      </p:sp>
+      <p:sp>
+        <p:nvSpPr>
+          <p:cNvPr id="10" name="TextBox 9"/>
+          <p:cNvSpPr txBox="1"/>
+          <p:nvPr/>
+        </p:nvSpPr>
+        <p:spPr>
+          <a:xfrm>
+            <a:off x="4480559" y="1901952"/>
+            <a:ext cx="3611880" cy="201168"/>
+          </a:xfrm>
+          <a:prstGeom prst="rect">
+            <a:avLst/>
+          </a:prstGeom>
+          <a:noFill/>
+        </p:spPr>
+        <p:txBody>
+          <a:bodyPr wrap="square" anchor="ctr">
+            <a:spAutoFit/>
+          </a:bodyPr>
+          <a:lstStyle/>
+          <a:p>
+            <a:pPr algn="ctr"/>
+            <a:r>
+              <a:rPr sz="1600" b="1">
+                <a:solidFill>
+                  <a:srgbClr val="FFFFFF"/>
+                </a:solidFill>
+                <a:latin typeface="Open Sans"/>
+              </a:rPr>
+              <a:t>Élève standard</a:t>
+            </a:r>
+          </a:p>
+        </p:txBody>
+      </p:sp>
+      <p:sp>
+        <p:nvSpPr>
+          <p:cNvPr id="11" name="TextBox 10"/>
+          <p:cNvSpPr txBox="1"/>
+          <p:nvPr/>
+        </p:nvSpPr>
+        <p:spPr>
+          <a:xfrm>
+            <a:off x="4590288" y="2606040"/>
+            <a:ext cx="3383280" cy="457200"/>
+          </a:xfrm>
+          <a:prstGeom prst="rect">
+            <a:avLst/>
+          </a:prstGeom>
+          <a:noFill/>
+        </p:spPr>
+        <p:txBody>
+          <a:bodyPr wrap="square" anchor="ctr">
+            <a:spAutoFit/>
+          </a:bodyPr>
+          <a:lstStyle/>
+          <a:p>
+            <a:pPr algn="ctr"/>
+            <a:r>
+              <a:rPr sz="1700" b="1">
+                <a:solidFill>
+                  <a:srgbClr val="222222"/>
+                </a:solidFill>
+                <a:latin typeface="Open Sans"/>
+              </a:rPr>
+              <a:t>Chemin classique</a:t>
+            </a:r>
+          </a:p>
+        </p:txBody>
+      </p:sp>
+      <p:sp>
+        <p:nvSpPr>
+          <p:cNvPr id="12" name="TextBox 11"/>
+          <p:cNvSpPr txBox="1"/>
+          <p:nvPr/>
+        </p:nvSpPr>
+        <p:spPr>
+          <a:xfrm>
+            <a:off x="4590288" y="3154680"/>
+            <a:ext cx="3383280" cy="320040"/>
+          </a:xfrm>
+          <a:prstGeom prst="rect">
+            <a:avLst/>
+          </a:prstGeom>
+          <a:noFill/>
+        </p:spPr>
+        <p:txBody>
+          <a:bodyPr wrap="square" anchor="ctr">
+            <a:spAutoFit/>
+          </a:bodyPr>
+          <a:lstStyle/>
+          <a:p>
+            <a:pPr algn="ctr"/>
+            <a:r>
+              <a:rPr sz="1300" b="0">
+                <a:solidFill>
+                  <a:srgbClr val="222222"/>
+                </a:solidFill>
+                <a:latin typeface="Open Sans"/>
+              </a:rPr>
+              <a:t>Adapter sans changer l’objectif</a:t>
+            </a:r>
+          </a:p>
+        </p:txBody>
+      </p:sp>
+      <p:sp>
+        <p:nvSpPr>
+          <p:cNvPr id="13" name="Rounded Rectangle 12"/>
+          <p:cNvSpPr/>
+          <p:nvPr/>
+        </p:nvSpPr>
+        <p:spPr>
+          <a:xfrm>
+            <a:off x="8302752" y="1828800"/>
+            <a:ext cx="3611880" cy="2468880"/>
+          </a:xfrm>
+          <a:prstGeom prst="roundRect">
+            <a:avLst/>
+          </a:prstGeom>
+          <a:solidFill>
+            <a:srgbClr val="FFFFFF"/>
+          </a:solidFill>
+          <a:ln>
+            <a:solidFill>
+              <a:srgbClr val="D9D9D9"/>
+            </a:solidFill>
+          </a:ln>
+        </p:spPr>
+        <p:style>
+          <a:lnRef idx="1">
+            <a:schemeClr val="accent1"/>
+          </a:lnRef>
+          <a:fillRef idx="3">
+            <a:schemeClr val="accent1"/>
+          </a:fillRef>
+          <a:effectRef idx="2">
+            <a:schemeClr val="accent1"/>
+          </a:effectRef>
+          <a:fontRef idx="minor">
+            <a:schemeClr val="lt1"/>
+          </a:fontRef>
+        </p:style>
+        <p:txBody>
+          <a:bodyPr rtlCol="0" anchor="ctr"/>
+          <a:lstStyle/>
+          <a:p>
+            <a:pPr algn="ctr"/>
+            <a:endParaRPr/>
+          </a:p>
+        </p:txBody>
+      </p:sp>
+      <p:sp>
+        <p:nvSpPr>
+          <p:cNvPr id="14" name="Rounded Rectangle 13"/>
+          <p:cNvSpPr/>
+          <p:nvPr/>
+        </p:nvSpPr>
+        <p:spPr>
+          <a:xfrm>
+            <a:off x="8302752" y="1828800"/>
+            <a:ext cx="3611880" cy="457200"/>
+          </a:xfrm>
+          <a:prstGeom prst="roundRect">
+            <a:avLst/>
+          </a:prstGeom>
+          <a:solidFill>
+            <a:srgbClr val="8F8F8F"/>
+          </a:solidFill>
+          <a:ln>
+            <a:solidFill>
+              <a:srgbClr val="8F8F8F"/>
+            </a:solidFill>
+          </a:ln>
+        </p:spPr>
+        <p:style>
+          <a:lnRef idx="1">
+            <a:schemeClr val="accent1"/>
+          </a:lnRef>
+          <a:fillRef idx="3">
+            <a:schemeClr val="accent1"/>
+          </a:fillRef>
+          <a:effectRef idx="2">
+            <a:schemeClr val="accent1"/>
+          </a:effectRef>
+          <a:fontRef idx="minor">
+            <a:schemeClr val="lt1"/>
+          </a:fontRef>
+        </p:style>
+        <p:txBody>
+          <a:bodyPr rtlCol="0" anchor="ctr"/>
+          <a:lstStyle/>
+          <a:p>
+            <a:pPr algn="ctr"/>
+            <a:endParaRPr/>
+          </a:p>
+        </p:txBody>
+      </p:sp>
+      <p:sp>
+        <p:nvSpPr>
+          <p:cNvPr id="15" name="TextBox 14"/>
+          <p:cNvSpPr txBox="1"/>
+          <p:nvPr/>
+        </p:nvSpPr>
+        <p:spPr>
+          <a:xfrm>
+            <a:off x="8302752" y="1901952"/>
+            <a:ext cx="3611880" cy="201168"/>
+          </a:xfrm>
+          <a:prstGeom prst="rect">
+            <a:avLst/>
+          </a:prstGeom>
+          <a:noFill/>
+        </p:spPr>
+        <p:txBody>
+          <a:bodyPr wrap="square" anchor="ctr">
+            <a:spAutoFit/>
+          </a:bodyPr>
+          <a:lstStyle/>
+          <a:p>
+            <a:pPr algn="ctr"/>
+            <a:r>
+              <a:rPr sz="1600" b="1">
+                <a:solidFill>
+                  <a:srgbClr val="FFFFFF"/>
+                </a:solidFill>
+                <a:latin typeface="Open Sans"/>
+              </a:rPr>
+              <a:t>Élève avancé</a:t>
+            </a:r>
+          </a:p>
+        </p:txBody>
+      </p:sp>
+      <p:sp>
+        <p:nvSpPr>
+          <p:cNvPr id="16" name="TextBox 15"/>
+          <p:cNvSpPr txBox="1"/>
+          <p:nvPr/>
+        </p:nvSpPr>
+        <p:spPr>
+          <a:xfrm>
+            <a:off x="8412480" y="2606040"/>
+            <a:ext cx="3383280" cy="457200"/>
+          </a:xfrm>
+          <a:prstGeom prst="rect">
+            <a:avLst/>
+          </a:prstGeom>
+          <a:noFill/>
+        </p:spPr>
+        <p:txBody>
+          <a:bodyPr wrap="square" anchor="ctr">
+            <a:spAutoFit/>
+          </a:bodyPr>
+          <a:lstStyle/>
+          <a:p>
+            <a:pPr algn="ctr"/>
+            <a:r>
+              <a:rPr sz="1700" b="1">
+                <a:solidFill>
+                  <a:srgbClr val="222222"/>
+                </a:solidFill>
+                <a:latin typeface="Open Sans"/>
+              </a:rPr>
+              <a:t>Défi supplémentaire</a:t>
+            </a:r>
+          </a:p>
+        </p:txBody>
+      </p:sp>
+      <p:sp>
+        <p:nvSpPr>
+          <p:cNvPr id="17" name="TextBox 16"/>
+          <p:cNvSpPr txBox="1"/>
+          <p:nvPr/>
+        </p:nvSpPr>
+        <p:spPr>
+          <a:xfrm>
+            <a:off x="8412480" y="3154680"/>
+            <a:ext cx="3383280" cy="320040"/>
+          </a:xfrm>
+          <a:prstGeom prst="rect">
+            <a:avLst/>
+          </a:prstGeom>
+          <a:noFill/>
+        </p:spPr>
+        <p:txBody>
+          <a:bodyPr wrap="square" anchor="ctr">
+            <a:spAutoFit/>
+          </a:bodyPr>
+          <a:lstStyle/>
+          <a:p>
+            <a:pPr algn="ctr"/>
+            <a:r>
+              <a:rPr sz="1300" b="0">
+                <a:solidFill>
+                  <a:srgbClr val="222222"/>
+                </a:solidFill>
+                <a:latin typeface="Open Sans"/>
+              </a:rPr>
+              <a:t>Adapter sans changer l’objectif</a:t>
+            </a:r>
+          </a:p>
+        </p:txBody>
+      </p:sp>
+      <p:sp>
+        <p:nvSpPr>
+          <p:cNvPr id="18" name="TextBox 17"/>
+          <p:cNvSpPr txBox="1"/>
+          <p:nvPr/>
+        </p:nvSpPr>
+        <p:spPr>
+          <a:xfrm>
+            <a:off x="914400" y="4663440"/>
+            <a:ext cx="10424160" cy="502920"/>
+          </a:xfrm>
+          <a:prstGeom prst="rect">
+            <a:avLst/>
+          </a:prstGeom>
+          <a:noFill/>
+        </p:spPr>
+        <p:txBody>
+          <a:bodyPr wrap="square" anchor="ctr">
+            <a:spAutoFit/>
+          </a:bodyPr>
+          <a:lstStyle/>
+          <a:p>
+            <a:pPr algn="ctr"/>
+            <a:r>
+              <a:rPr sz="1800" b="0">
+                <a:solidFill>
+                  <a:srgbClr val="222222"/>
+                </a:solidFill>
+                <a:latin typeface="Open Sans"/>
+              </a:rPr>
+              <a:t>Reprends cette séance et adapte-la aux trois niveaux. Conserve le même objectif.</a:t>
+            </a:r>
+          </a:p>
+        </p:txBody>
+      </p:sp>
+      <p:sp>
+        <p:nvSpPr>
+          <p:cNvPr id="19" name="Rectangle 18"/>
           <p:cNvSpPr/>
           <p:nvPr/>
         </p:nvSpPr>
@@ -8073,7 +8623,7 @@
       </p:sp>
       <p:sp>
         <p:nvSpPr>
-          <p:cNvPr id="11" name="TextBox 10"/>
+          <p:cNvPr id="20" name="TextBox 19"/>
           <p:cNvSpPr txBox="1"/>
           <p:nvPr/>
         </p:nvSpPr>
@@ -8107,6 +8657,36 @@
           </a:p>
         </p:txBody>
       </p:sp>
+      <p:pic>
+        <p:nvPicPr>
+          <p:cNvPr id="21" name="Image 20">
+            <a:extLst>
+              <a:ext uri="{FF2B5EF4-FFF2-40B4-BE49-F238E27FC236}">
+                <a16:creationId xmlns:a16="http://schemas.microsoft.com/office/drawing/2014/main" id="{F237FF4D-B8A0-2F5B-C97C-912F35132809}"/>
+              </a:ext>
+            </a:extLst>
+          </p:cNvPr>
+          <p:cNvPicPr>
+            <a:picLocks noChangeAspect="1"/>
+          </p:cNvPicPr>
+          <p:nvPr/>
+        </p:nvPicPr>
+        <p:blipFill>
+          <a:blip r:embed="rId2"/>
+          <a:stretch>
+            <a:fillRect/>
+          </a:stretch>
+        </p:blipFill>
+        <p:spPr>
+          <a:xfrm>
+            <a:off x="11124914" y="5976856"/>
+            <a:ext cx="1036891" cy="847888"/>
+          </a:xfrm>
+          <a:prstGeom prst="rect">
+            <a:avLst/>
+          </a:prstGeom>
+        </p:spPr>
+      </p:pic>
     </p:spTree>
   </p:cSld>
   <p:clrMapOvr>
@@ -8148,8 +8728,8 @@
         </p:nvSpPr>
         <p:spPr>
           <a:xfrm>
-            <a:off x="3975090" y="320040"/>
-            <a:ext cx="4302780" cy="523220"/>
+            <a:off x="640080" y="320040"/>
+            <a:ext cx="10972800" cy="777240"/>
           </a:xfrm>
           <a:prstGeom prst="rect">
             <a:avLst/>
@@ -8162,40 +8742,15 @@
           </a:bodyPr>
           <a:lstStyle/>
           <a:p>
-            <a:pPr algn="ctr"/>
-            <a:r>
-              <a:rPr sz="2800" b="1" dirty="0" err="1">
+            <a:r>
+              <a:rPr sz="2800" b="1">
                 <a:solidFill>
                   <a:srgbClr val="004A7C"/>
                 </a:solidFill>
                 <a:latin typeface="Montserrat"/>
               </a:rPr>
-              <a:t>Activité</a:t>
-            </a:r>
-            <a:r>
-              <a:rPr sz="2800" b="1" dirty="0">
-                <a:solidFill>
-                  <a:srgbClr val="004A7C"/>
-                </a:solidFill>
-                <a:latin typeface="Montserrat"/>
-              </a:rPr>
-              <a:t> des </a:t>
-            </a:r>
-            <a:r>
-              <a:rPr sz="2800" b="1" dirty="0" err="1">
-                <a:solidFill>
-                  <a:srgbClr val="004A7C"/>
-                </a:solidFill>
-                <a:latin typeface="Montserrat"/>
-              </a:rPr>
-              <a:t>collègues</a:t>
-            </a:r>
-            <a:endParaRPr sz="2800" b="1" dirty="0">
-              <a:solidFill>
-                <a:srgbClr val="004A7C"/>
-              </a:solidFill>
-              <a:latin typeface="Montserrat"/>
-            </a:endParaRPr>
+              <a:t>Démonstration WOW n°3</a:t>
+            </a:r>
           </a:p>
         </p:txBody>
       </p:sp>
@@ -8207,8 +8762,8 @@
         </p:nvSpPr>
         <p:spPr>
           <a:xfrm>
-            <a:off x="868680" y="1554480"/>
-            <a:ext cx="10378440" cy="3703320"/>
+            <a:off x="868680" y="1783080"/>
+            <a:ext cx="3840480" cy="2697480"/>
           </a:xfrm>
           <a:prstGeom prst="roundRect">
             <a:avLst/>
@@ -8253,8 +8808,8 @@
         </p:nvSpPr>
         <p:spPr>
           <a:xfrm>
-            <a:off x="1143000" y="2011680"/>
-            <a:ext cx="9875520" cy="502920"/>
+            <a:off x="868680" y="2148840"/>
+            <a:ext cx="3840480" cy="411480"/>
           </a:xfrm>
           <a:prstGeom prst="rect">
             <a:avLst/>
@@ -8269,13 +8824,13 @@
           <a:p>
             <a:pPr algn="ctr"/>
             <a:r>
-              <a:rPr sz="2200" b="1">
-                <a:solidFill>
-                  <a:srgbClr val="004A7C"/>
+              <a:rPr sz="3400" b="0">
+                <a:solidFill>
+                  <a:srgbClr val="F36C21"/>
                 </a:solidFill>
                 <a:latin typeface="Open Sans"/>
               </a:rPr>
-              <a:t>Prenez un cours que vous devez faire dans les 15 prochains jours.</a:t>
+              <a:t>📝</a:t>
             </a:r>
           </a:p>
         </p:txBody>
@@ -8288,8 +8843,8 @@
         </p:nvSpPr>
         <p:spPr>
           <a:xfrm>
-            <a:off x="1143000" y="2670048"/>
-            <a:ext cx="9875520" cy="502920"/>
+            <a:off x="914400" y="2697480"/>
+            <a:ext cx="3749039" cy="502920"/>
           </a:xfrm>
           <a:prstGeom prst="rect">
             <a:avLst/>
@@ -8304,13 +8859,13 @@
           <a:p>
             <a:pPr algn="ctr"/>
             <a:r>
-              <a:rPr sz="1900" b="0">
+              <a:rPr sz="1800" b="1">
                 <a:solidFill>
                   <a:srgbClr val="222222"/>
                 </a:solidFill>
                 <a:latin typeface="Open Sans"/>
               </a:rPr>
-              <a:t>Objectif : créer une activité, une différenciation, une évaluation.</a:t>
+              <a:t>Créer une évaluation de 15 minutes</a:t>
             </a:r>
           </a:p>
         </p:txBody>
@@ -8323,8 +8878,8 @@
         </p:nvSpPr>
         <p:spPr>
           <a:xfrm>
-            <a:off x="1143000" y="3401568"/>
-            <a:ext cx="9875520" cy="1097280"/>
+            <a:off x="4892040" y="1783080"/>
+            <a:ext cx="6355080" cy="2697480"/>
           </a:xfrm>
           <a:prstGeom prst="roundRect">
             <a:avLst/>
@@ -8369,8 +8924,8 @@
         </p:nvSpPr>
         <p:spPr>
           <a:xfrm>
-            <a:off x="1371600" y="3703320"/>
-            <a:ext cx="9418320" cy="320040"/>
+            <a:off x="5212080" y="2286000"/>
+            <a:ext cx="5760720" cy="411480"/>
           </a:xfrm>
           <a:prstGeom prst="rect">
             <a:avLst/>
@@ -8385,20 +8940,90 @@
           <a:p>
             <a:pPr algn="ctr"/>
             <a:r>
-              <a:rPr sz="1600" b="0">
-                <a:solidFill>
-                  <a:srgbClr val="222222"/>
+              <a:rPr sz="2200" b="1">
+                <a:solidFill>
+                  <a:srgbClr val="004A7C"/>
                 </a:solidFill>
                 <a:latin typeface="Open Sans"/>
               </a:rPr>
-              <a:t>Zone de travail libre / brouillon / prise de notes</a:t>
-            </a:r>
-          </a:p>
-        </p:txBody>
-      </p:sp>
-      <p:sp>
-        <p:nvSpPr>
-          <p:cNvPr id="8" name="Rectangle 7"/>
+              <a:t>Sujet</a:t>
+            </a:r>
+          </a:p>
+        </p:txBody>
+      </p:sp>
+      <p:sp>
+        <p:nvSpPr>
+          <p:cNvPr id="8" name="TextBox 7"/>
+          <p:cNvSpPr txBox="1"/>
+          <p:nvPr/>
+        </p:nvSpPr>
+        <p:spPr>
+          <a:xfrm>
+            <a:off x="5212080" y="2788920"/>
+            <a:ext cx="5760720" cy="411480"/>
+          </a:xfrm>
+          <a:prstGeom prst="rect">
+            <a:avLst/>
+          </a:prstGeom>
+          <a:noFill/>
+        </p:spPr>
+        <p:txBody>
+          <a:bodyPr wrap="square" anchor="ctr">
+            <a:spAutoFit/>
+          </a:bodyPr>
+          <a:lstStyle/>
+          <a:p>
+            <a:pPr algn="ctr"/>
+            <a:r>
+              <a:rPr sz="2200" b="1">
+                <a:solidFill>
+                  <a:srgbClr val="004A7C"/>
+                </a:solidFill>
+                <a:latin typeface="Open Sans"/>
+              </a:rPr>
+              <a:t>Corrigé</a:t>
+            </a:r>
+          </a:p>
+        </p:txBody>
+      </p:sp>
+      <p:sp>
+        <p:nvSpPr>
+          <p:cNvPr id="9" name="TextBox 8"/>
+          <p:cNvSpPr txBox="1"/>
+          <p:nvPr/>
+        </p:nvSpPr>
+        <p:spPr>
+          <a:xfrm>
+            <a:off x="5212080" y="3291840"/>
+            <a:ext cx="5760720" cy="411480"/>
+          </a:xfrm>
+          <a:prstGeom prst="rect">
+            <a:avLst/>
+          </a:prstGeom>
+          <a:noFill/>
+        </p:spPr>
+        <p:txBody>
+          <a:bodyPr wrap="square" anchor="ctr">
+            <a:spAutoFit/>
+          </a:bodyPr>
+          <a:lstStyle/>
+          <a:p>
+            <a:pPr algn="ctr"/>
+            <a:r>
+              <a:rPr sz="2200" b="1">
+                <a:solidFill>
+                  <a:srgbClr val="004A7C"/>
+                </a:solidFill>
+                <a:latin typeface="Open Sans"/>
+              </a:rPr>
+              <a:t>Barème</a:t>
+            </a:r>
+          </a:p>
+        </p:txBody>
+      </p:sp>
+      <p:sp>
+        <p:nvSpPr>
+          <p:cNvPr id="10" name="Rectangle 9"/>
           <p:cNvSpPr/>
           <p:nvPr/>
         </p:nvSpPr>
@@ -8442,7 +9067,7 @@
       </p:sp>
       <p:sp>
         <p:nvSpPr>
-          <p:cNvPr id="9" name="TextBox 8"/>
+          <p:cNvPr id="11" name="TextBox 10"/>
           <p:cNvSpPr txBox="1"/>
           <p:nvPr/>
         </p:nvSpPr>
@@ -8476,6 +9101,36 @@
           </a:p>
         </p:txBody>
       </p:sp>
+      <p:pic>
+        <p:nvPicPr>
+          <p:cNvPr id="12" name="Image 11">
+            <a:extLst>
+              <a:ext uri="{FF2B5EF4-FFF2-40B4-BE49-F238E27FC236}">
+                <a16:creationId xmlns:a16="http://schemas.microsoft.com/office/drawing/2014/main" id="{47239257-656D-AE11-6A97-9C096C4A322F}"/>
+              </a:ext>
+            </a:extLst>
+          </p:cNvPr>
+          <p:cNvPicPr>
+            <a:picLocks noChangeAspect="1"/>
+          </p:cNvPicPr>
+          <p:nvPr/>
+        </p:nvPicPr>
+        <p:blipFill>
+          <a:blip r:embed="rId2"/>
+          <a:stretch>
+            <a:fillRect/>
+          </a:stretch>
+        </p:blipFill>
+        <p:spPr>
+          <a:xfrm>
+            <a:off x="11124914" y="5976856"/>
+            <a:ext cx="1036891" cy="847888"/>
+          </a:xfrm>
+          <a:prstGeom prst="rect">
+            <a:avLst/>
+          </a:prstGeom>
+        </p:spPr>
+      </p:pic>
     </p:spTree>
   </p:cSld>
   <p:clrMapOvr>
@@ -8517,8 +9172,8 @@
         </p:nvSpPr>
         <p:spPr>
           <a:xfrm>
-            <a:off x="4740523" y="320040"/>
-            <a:ext cx="2771913" cy="523220"/>
+            <a:off x="3975090" y="320040"/>
+            <a:ext cx="4302780" cy="523220"/>
           </a:xfrm>
           <a:prstGeom prst="rect">
             <a:avLst/>
@@ -8539,7 +9194,25 @@
                 </a:solidFill>
                 <a:latin typeface="Montserrat"/>
               </a:rPr>
-              <a:t>Mutualisation</a:t>
+              <a:t>Activité</a:t>
+            </a:r>
+            <a:r>
+              <a:rPr sz="2800" b="1" dirty="0">
+                <a:solidFill>
+                  <a:srgbClr val="004A7C"/>
+                </a:solidFill>
+                <a:latin typeface="Montserrat"/>
+              </a:rPr>
+              <a:t> des </a:t>
+            </a:r>
+            <a:r>
+              <a:rPr sz="2800" b="1" dirty="0" err="1">
+                <a:solidFill>
+                  <a:srgbClr val="004A7C"/>
+                </a:solidFill>
+                <a:latin typeface="Montserrat"/>
+              </a:rPr>
+              <a:t>collègues</a:t>
             </a:r>
             <a:endParaRPr sz="2800" b="1" dirty="0">
               <a:solidFill>
@@ -8558,8 +9231,8 @@
         </p:nvSpPr>
         <p:spPr>
           <a:xfrm>
-            <a:off x="914400" y="1828800"/>
-            <a:ext cx="10332720" cy="3200400"/>
+            <a:off x="868680" y="1554480"/>
+            <a:ext cx="10378440" cy="3703320"/>
           </a:xfrm>
           <a:prstGeom prst="roundRect">
             <a:avLst/>
@@ -8604,8 +9277,8 @@
         </p:nvSpPr>
         <p:spPr>
           <a:xfrm>
-            <a:off x="1234440" y="2286000"/>
-            <a:ext cx="9692640" cy="548640"/>
+            <a:off x="1143000" y="2011680"/>
+            <a:ext cx="9875520" cy="502920"/>
           </a:xfrm>
           <a:prstGeom prst="rect">
             <a:avLst/>
@@ -8620,13 +9293,13 @@
           <a:p>
             <a:pPr algn="ctr"/>
             <a:r>
-              <a:rPr sz="2400" b="1">
+              <a:rPr sz="2200" b="1">
                 <a:solidFill>
                   <a:srgbClr val="004A7C"/>
                 </a:solidFill>
                 <a:latin typeface="Open Sans"/>
               </a:rPr>
-              <a:t>Partageons vos productions :</a:t>
+              <a:t>Prenez un cours que vous devez faire dans les 15 prochains jours.</a:t>
             </a:r>
           </a:p>
         </p:txBody>
@@ -8639,8 +9312,8 @@
         </p:nvSpPr>
         <p:spPr>
           <a:xfrm>
-            <a:off x="1234440" y="2880360"/>
-            <a:ext cx="9692640" cy="502920"/>
+            <a:off x="1143000" y="2670048"/>
+            <a:ext cx="9875520" cy="502920"/>
           </a:xfrm>
           <a:prstGeom prst="rect">
             <a:avLst/>
@@ -8655,13 +9328,13 @@
           <a:p>
             <a:pPr algn="ctr"/>
             <a:r>
-              <a:rPr sz="2000" b="0">
+              <a:rPr sz="1900" b="0">
                 <a:solidFill>
                   <a:srgbClr val="222222"/>
                 </a:solidFill>
                 <a:latin typeface="Open Sans"/>
               </a:rPr>
-              <a:t>ce qui vous a surpris, ce que vous allez réutiliser.</a:t>
+              <a:t>Objectif : créer une activité, une différenciation, une évaluation.</a:t>
             </a:r>
           </a:p>
         </p:txBody>
@@ -8674,18 +9347,18 @@
         </p:nvSpPr>
         <p:spPr>
           <a:xfrm>
-            <a:off x="1234440" y="3657600"/>
-            <a:ext cx="9692640" cy="777240"/>
+            <a:off x="1143000" y="3401568"/>
+            <a:ext cx="9875520" cy="1097280"/>
           </a:xfrm>
           <a:prstGeom prst="roundRect">
             <a:avLst/>
           </a:prstGeom>
           <a:solidFill>
-            <a:srgbClr val="E8F1F8"/>
+            <a:srgbClr val="ECECEC"/>
           </a:solidFill>
           <a:ln>
             <a:solidFill>
-              <a:srgbClr val="E8F1F8"/>
+              <a:srgbClr val="ECECEC"/>
             </a:solidFill>
           </a:ln>
         </p:spPr>
@@ -8720,8 +9393,8 @@
         </p:nvSpPr>
         <p:spPr>
           <a:xfrm>
-            <a:off x="1417320" y="3913632"/>
-            <a:ext cx="9326880" cy="182880"/>
+            <a:off x="1371600" y="3703320"/>
+            <a:ext cx="9418320" cy="320040"/>
           </a:xfrm>
           <a:prstGeom prst="rect">
             <a:avLst/>
@@ -8736,13 +9409,13 @@
           <a:p>
             <a:pPr algn="ctr"/>
             <a:r>
-              <a:rPr sz="1500" b="0">
-                <a:solidFill>
-                  <a:srgbClr val="004A7C"/>
+              <a:rPr sz="1600" b="0">
+                <a:solidFill>
+                  <a:srgbClr val="222222"/>
                 </a:solidFill>
                 <a:latin typeface="Open Sans"/>
               </a:rPr>
-              <a:t>Espace pour captures ou retours oraux</a:t>
+              <a:t>Zone de travail libre / brouillon / prise de notes</a:t>
             </a:r>
           </a:p>
         </p:txBody>
@@ -8827,6 +9500,36 @@
           </a:p>
         </p:txBody>
       </p:sp>
+      <p:pic>
+        <p:nvPicPr>
+          <p:cNvPr id="10" name="Image 9">
+            <a:extLst>
+              <a:ext uri="{FF2B5EF4-FFF2-40B4-BE49-F238E27FC236}">
+                <a16:creationId xmlns:a16="http://schemas.microsoft.com/office/drawing/2014/main" id="{36F2106C-98E9-13B8-4809-2F24097B9EA8}"/>
+              </a:ext>
+            </a:extLst>
+          </p:cNvPr>
+          <p:cNvPicPr>
+            <a:picLocks noChangeAspect="1"/>
+          </p:cNvPicPr>
+          <p:nvPr/>
+        </p:nvPicPr>
+        <p:blipFill>
+          <a:blip r:embed="rId2"/>
+          <a:stretch>
+            <a:fillRect/>
+          </a:stretch>
+        </p:blipFill>
+        <p:spPr>
+          <a:xfrm>
+            <a:off x="11124914" y="5976856"/>
+            <a:ext cx="1036891" cy="847888"/>
+          </a:xfrm>
+          <a:prstGeom prst="rect">
+            <a:avLst/>
+          </a:prstGeom>
+        </p:spPr>
+      </p:pic>
     </p:spTree>
   </p:cSld>
   <p:clrMapOvr>
